--- a/容我寧靜.pptx
+++ b/容我寧靜.pptx
@@ -5,9 +5,14 @@
     <p:sldMasterId id="2147483660" r:id="rId1"/>
   </p:sldMasterIdLst>
   <p:sldIdLst>
-    <p:sldId id="256" r:id="rId2"/>
-    <p:sldId id="258" r:id="rId3"/>
-    <p:sldId id="257" r:id="rId4"/>
+    <p:sldId id="391" r:id="rId2"/>
+    <p:sldId id="392" r:id="rId3"/>
+    <p:sldId id="393" r:id="rId4"/>
+    <p:sldId id="394" r:id="rId5"/>
+    <p:sldId id="395" r:id="rId6"/>
+    <p:sldId id="396" r:id="rId7"/>
+    <p:sldId id="397" r:id="rId8"/>
+    <p:sldId id="398" r:id="rId9"/>
   </p:sldIdLst>
   <p:sldSz cx="9144000" cy="5143500" type="screen16x9"/>
   <p:notesSz cx="6858000" cy="9144000"/>
@@ -106,6 +111,22 @@
       </a:defRPr>
     </a:lvl9pPr>
   </p:defaultTextStyle>
+  <p:extLst>
+    <p:ext uri="{EFAFB233-063F-42B5-8137-9DF3F51BA10A}">
+      <p15:sldGuideLst xmlns:p15="http://schemas.microsoft.com/office/powerpoint/2012/main">
+        <p15:guide id="1" orient="horz" pos="1620">
+          <p15:clr>
+            <a:srgbClr val="A4A3A4"/>
+          </p15:clr>
+        </p15:guide>
+        <p15:guide id="2" pos="2880">
+          <p15:clr>
+            <a:srgbClr val="A4A3A4"/>
+          </p15:clr>
+        </p15:guide>
+      </p15:sldGuideLst>
+    </p:ext>
+  </p:extLst>
 </p:presentation>
 </file>
 
@@ -147,10 +168,9 @@
           <a:lstStyle/>
           <a:p>
             <a:r>
-              <a:rPr lang="zh-TW" altLang="en-US" smtClean="0"/>
+              <a:rPr lang="zh-TW" altLang="en-US"/>
               <a:t>按一下以編輯母片標題樣式</a:t>
             </a:r>
-            <a:endParaRPr lang="zh-TW" altLang="en-US"/>
           </a:p>
         </p:txBody>
       </p:sp>
@@ -266,10 +286,9 @@
           </a:lstStyle>
           <a:p>
             <a:r>
-              <a:rPr lang="zh-TW" altLang="en-US" smtClean="0"/>
+              <a:rPr lang="zh-TW" altLang="en-US"/>
               <a:t>按一下以編輯母片副標題樣式</a:t>
             </a:r>
-            <a:endParaRPr lang="zh-TW" altLang="en-US"/>
           </a:p>
         </p:txBody>
       </p:sp>
@@ -291,7 +310,7 @@
             <a:fld id="{E5595432-FB33-4E7B-BE27-1C70122E4CA3}" type="datetimeFigureOut">
               <a:rPr lang="zh-TW" altLang="en-US" smtClean="0"/>
               <a:pPr/>
-              <a:t>2022/3/22</a:t>
+              <a:t>2026/6/12</a:t>
             </a:fld>
             <a:endParaRPr lang="zh-TW" altLang="en-US"/>
           </a:p>
@@ -381,10 +400,9 @@
           <a:lstStyle/>
           <a:p>
             <a:r>
-              <a:rPr lang="zh-TW" altLang="en-US" smtClean="0"/>
+              <a:rPr lang="zh-TW" altLang="en-US"/>
               <a:t>按一下以編輯母片標題樣式</a:t>
             </a:r>
-            <a:endParaRPr lang="zh-TW" altLang="en-US"/>
           </a:p>
         </p:txBody>
       </p:sp>
@@ -405,38 +423,37 @@
           <a:p>
             <a:pPr lvl="0"/>
             <a:r>
-              <a:rPr lang="zh-TW" altLang="en-US" smtClean="0"/>
+              <a:rPr lang="zh-TW" altLang="en-US"/>
               <a:t>按一下以編輯母片文字樣式</a:t>
             </a:r>
           </a:p>
           <a:p>
             <a:pPr lvl="1"/>
             <a:r>
-              <a:rPr lang="zh-TW" altLang="en-US" smtClean="0"/>
+              <a:rPr lang="zh-TW" altLang="en-US"/>
               <a:t>第二層</a:t>
             </a:r>
           </a:p>
           <a:p>
             <a:pPr lvl="2"/>
             <a:r>
-              <a:rPr lang="zh-TW" altLang="en-US" smtClean="0"/>
+              <a:rPr lang="zh-TW" altLang="en-US"/>
               <a:t>第三層</a:t>
             </a:r>
           </a:p>
           <a:p>
             <a:pPr lvl="3"/>
             <a:r>
-              <a:rPr lang="zh-TW" altLang="en-US" smtClean="0"/>
+              <a:rPr lang="zh-TW" altLang="en-US"/>
               <a:t>第四層</a:t>
             </a:r>
           </a:p>
           <a:p>
             <a:pPr lvl="4"/>
             <a:r>
-              <a:rPr lang="zh-TW" altLang="en-US" smtClean="0"/>
+              <a:rPr lang="zh-TW" altLang="en-US"/>
               <a:t>第五層</a:t>
             </a:r>
-            <a:endParaRPr lang="zh-TW" altLang="en-US"/>
           </a:p>
         </p:txBody>
       </p:sp>
@@ -458,7 +475,7 @@
             <a:fld id="{E5595432-FB33-4E7B-BE27-1C70122E4CA3}" type="datetimeFigureOut">
               <a:rPr lang="zh-TW" altLang="en-US" smtClean="0"/>
               <a:pPr/>
-              <a:t>2022/3/22</a:t>
+              <a:t>2026/6/12</a:t>
             </a:fld>
             <a:endParaRPr lang="zh-TW" altLang="en-US"/>
           </a:p>
@@ -553,10 +570,9 @@
           <a:lstStyle/>
           <a:p>
             <a:r>
-              <a:rPr lang="zh-TW" altLang="en-US" smtClean="0"/>
+              <a:rPr lang="zh-TW" altLang="en-US"/>
               <a:t>按一下以編輯母片標題樣式</a:t>
             </a:r>
-            <a:endParaRPr lang="zh-TW" altLang="en-US"/>
           </a:p>
         </p:txBody>
       </p:sp>
@@ -582,38 +598,37 @@
           <a:p>
             <a:pPr lvl="0"/>
             <a:r>
-              <a:rPr lang="zh-TW" altLang="en-US" smtClean="0"/>
+              <a:rPr lang="zh-TW" altLang="en-US"/>
               <a:t>按一下以編輯母片文字樣式</a:t>
             </a:r>
           </a:p>
           <a:p>
             <a:pPr lvl="1"/>
             <a:r>
-              <a:rPr lang="zh-TW" altLang="en-US" smtClean="0"/>
+              <a:rPr lang="zh-TW" altLang="en-US"/>
               <a:t>第二層</a:t>
             </a:r>
           </a:p>
           <a:p>
             <a:pPr lvl="2"/>
             <a:r>
-              <a:rPr lang="zh-TW" altLang="en-US" smtClean="0"/>
+              <a:rPr lang="zh-TW" altLang="en-US"/>
               <a:t>第三層</a:t>
             </a:r>
           </a:p>
           <a:p>
             <a:pPr lvl="3"/>
             <a:r>
-              <a:rPr lang="zh-TW" altLang="en-US" smtClean="0"/>
+              <a:rPr lang="zh-TW" altLang="en-US"/>
               <a:t>第四層</a:t>
             </a:r>
           </a:p>
           <a:p>
             <a:pPr lvl="4"/>
             <a:r>
-              <a:rPr lang="zh-TW" altLang="en-US" smtClean="0"/>
+              <a:rPr lang="zh-TW" altLang="en-US"/>
               <a:t>第五層</a:t>
             </a:r>
-            <a:endParaRPr lang="zh-TW" altLang="en-US"/>
           </a:p>
         </p:txBody>
       </p:sp>
@@ -635,7 +650,7 @@
             <a:fld id="{E5595432-FB33-4E7B-BE27-1C70122E4CA3}" type="datetimeFigureOut">
               <a:rPr lang="zh-TW" altLang="en-US" smtClean="0"/>
               <a:pPr/>
-              <a:t>2022/3/22</a:t>
+              <a:t>2026/6/12</a:t>
             </a:fld>
             <a:endParaRPr lang="zh-TW" altLang="en-US"/>
           </a:p>
@@ -725,10 +740,9 @@
           <a:lstStyle/>
           <a:p>
             <a:r>
-              <a:rPr lang="zh-TW" altLang="en-US" smtClean="0"/>
+              <a:rPr lang="zh-TW" altLang="en-US"/>
               <a:t>按一下以編輯母片標題樣式</a:t>
             </a:r>
-            <a:endParaRPr lang="zh-TW" altLang="en-US"/>
           </a:p>
         </p:txBody>
       </p:sp>
@@ -749,38 +763,37 @@
           <a:p>
             <a:pPr lvl="0"/>
             <a:r>
-              <a:rPr lang="zh-TW" altLang="en-US" smtClean="0"/>
+              <a:rPr lang="zh-TW" altLang="en-US"/>
               <a:t>按一下以編輯母片文字樣式</a:t>
             </a:r>
           </a:p>
           <a:p>
             <a:pPr lvl="1"/>
             <a:r>
-              <a:rPr lang="zh-TW" altLang="en-US" smtClean="0"/>
+              <a:rPr lang="zh-TW" altLang="en-US"/>
               <a:t>第二層</a:t>
             </a:r>
           </a:p>
           <a:p>
             <a:pPr lvl="2"/>
             <a:r>
-              <a:rPr lang="zh-TW" altLang="en-US" smtClean="0"/>
+              <a:rPr lang="zh-TW" altLang="en-US"/>
               <a:t>第三層</a:t>
             </a:r>
           </a:p>
           <a:p>
             <a:pPr lvl="3"/>
             <a:r>
-              <a:rPr lang="zh-TW" altLang="en-US" smtClean="0"/>
+              <a:rPr lang="zh-TW" altLang="en-US"/>
               <a:t>第四層</a:t>
             </a:r>
           </a:p>
           <a:p>
             <a:pPr lvl="4"/>
             <a:r>
-              <a:rPr lang="zh-TW" altLang="en-US" smtClean="0"/>
+              <a:rPr lang="zh-TW" altLang="en-US"/>
               <a:t>第五層</a:t>
             </a:r>
-            <a:endParaRPr lang="zh-TW" altLang="en-US"/>
           </a:p>
         </p:txBody>
       </p:sp>
@@ -802,7 +815,7 @@
             <a:fld id="{E5595432-FB33-4E7B-BE27-1C70122E4CA3}" type="datetimeFigureOut">
               <a:rPr lang="zh-TW" altLang="en-US" smtClean="0"/>
               <a:pPr/>
-              <a:t>2022/3/22</a:t>
+              <a:t>2026/6/12</a:t>
             </a:fld>
             <a:endParaRPr lang="zh-TW" altLang="en-US"/>
           </a:p>
@@ -901,10 +914,9 @@
           </a:lstStyle>
           <a:p>
             <a:r>
-              <a:rPr lang="zh-TW" altLang="en-US" smtClean="0"/>
+              <a:rPr lang="zh-TW" altLang="en-US"/>
               <a:t>按一下以編輯母片標題樣式</a:t>
             </a:r>
-            <a:endParaRPr lang="zh-TW" altLang="en-US"/>
           </a:p>
         </p:txBody>
       </p:sp>
@@ -1021,7 +1033,7 @@
           <a:p>
             <a:pPr lvl="0"/>
             <a:r>
-              <a:rPr lang="zh-TW" altLang="en-US" smtClean="0"/>
+              <a:rPr lang="zh-TW" altLang="en-US"/>
               <a:t>按一下以編輯母片文字樣式</a:t>
             </a:r>
           </a:p>
@@ -1045,7 +1057,7 @@
             <a:fld id="{E5595432-FB33-4E7B-BE27-1C70122E4CA3}" type="datetimeFigureOut">
               <a:rPr lang="zh-TW" altLang="en-US" smtClean="0"/>
               <a:pPr/>
-              <a:t>2022/3/22</a:t>
+              <a:t>2026/6/12</a:t>
             </a:fld>
             <a:endParaRPr lang="zh-TW" altLang="en-US"/>
           </a:p>
@@ -1135,10 +1147,9 @@
           <a:lstStyle/>
           <a:p>
             <a:r>
-              <a:rPr lang="zh-TW" altLang="en-US" smtClean="0"/>
+              <a:rPr lang="zh-TW" altLang="en-US"/>
               <a:t>按一下以編輯母片標題樣式</a:t>
             </a:r>
-            <a:endParaRPr lang="zh-TW" altLang="en-US"/>
           </a:p>
         </p:txBody>
       </p:sp>
@@ -1192,38 +1203,37 @@
           <a:p>
             <a:pPr lvl="0"/>
             <a:r>
-              <a:rPr lang="zh-TW" altLang="en-US" smtClean="0"/>
+              <a:rPr lang="zh-TW" altLang="en-US"/>
               <a:t>按一下以編輯母片文字樣式</a:t>
             </a:r>
           </a:p>
           <a:p>
             <a:pPr lvl="1"/>
             <a:r>
-              <a:rPr lang="zh-TW" altLang="en-US" smtClean="0"/>
+              <a:rPr lang="zh-TW" altLang="en-US"/>
               <a:t>第二層</a:t>
             </a:r>
           </a:p>
           <a:p>
             <a:pPr lvl="2"/>
             <a:r>
-              <a:rPr lang="zh-TW" altLang="en-US" smtClean="0"/>
+              <a:rPr lang="zh-TW" altLang="en-US"/>
               <a:t>第三層</a:t>
             </a:r>
           </a:p>
           <a:p>
             <a:pPr lvl="3"/>
             <a:r>
-              <a:rPr lang="zh-TW" altLang="en-US" smtClean="0"/>
+              <a:rPr lang="zh-TW" altLang="en-US"/>
               <a:t>第四層</a:t>
             </a:r>
           </a:p>
           <a:p>
             <a:pPr lvl="4"/>
             <a:r>
-              <a:rPr lang="zh-TW" altLang="en-US" smtClean="0"/>
+              <a:rPr lang="zh-TW" altLang="en-US"/>
               <a:t>第五層</a:t>
             </a:r>
-            <a:endParaRPr lang="zh-TW" altLang="en-US"/>
           </a:p>
         </p:txBody>
       </p:sp>
@@ -1277,38 +1287,37 @@
           <a:p>
             <a:pPr lvl="0"/>
             <a:r>
-              <a:rPr lang="zh-TW" altLang="en-US" smtClean="0"/>
+              <a:rPr lang="zh-TW" altLang="en-US"/>
               <a:t>按一下以編輯母片文字樣式</a:t>
             </a:r>
           </a:p>
           <a:p>
             <a:pPr lvl="1"/>
             <a:r>
-              <a:rPr lang="zh-TW" altLang="en-US" smtClean="0"/>
+              <a:rPr lang="zh-TW" altLang="en-US"/>
               <a:t>第二層</a:t>
             </a:r>
           </a:p>
           <a:p>
             <a:pPr lvl="2"/>
             <a:r>
-              <a:rPr lang="zh-TW" altLang="en-US" smtClean="0"/>
+              <a:rPr lang="zh-TW" altLang="en-US"/>
               <a:t>第三層</a:t>
             </a:r>
           </a:p>
           <a:p>
             <a:pPr lvl="3"/>
             <a:r>
-              <a:rPr lang="zh-TW" altLang="en-US" smtClean="0"/>
+              <a:rPr lang="zh-TW" altLang="en-US"/>
               <a:t>第四層</a:t>
             </a:r>
           </a:p>
           <a:p>
             <a:pPr lvl="4"/>
             <a:r>
-              <a:rPr lang="zh-TW" altLang="en-US" smtClean="0"/>
+              <a:rPr lang="zh-TW" altLang="en-US"/>
               <a:t>第五層</a:t>
             </a:r>
-            <a:endParaRPr lang="zh-TW" altLang="en-US"/>
           </a:p>
         </p:txBody>
       </p:sp>
@@ -1330,7 +1339,7 @@
             <a:fld id="{E5595432-FB33-4E7B-BE27-1C70122E4CA3}" type="datetimeFigureOut">
               <a:rPr lang="zh-TW" altLang="en-US" smtClean="0"/>
               <a:pPr/>
-              <a:t>2022/3/22</a:t>
+              <a:t>2026/6/12</a:t>
             </a:fld>
             <a:endParaRPr lang="zh-TW" altLang="en-US"/>
           </a:p>
@@ -1424,10 +1433,9 @@
           </a:lstStyle>
           <a:p>
             <a:r>
-              <a:rPr lang="zh-TW" altLang="en-US" smtClean="0"/>
+              <a:rPr lang="zh-TW" altLang="en-US"/>
               <a:t>按一下以編輯母片標題樣式</a:t>
             </a:r>
-            <a:endParaRPr lang="zh-TW" altLang="en-US"/>
           </a:p>
         </p:txBody>
       </p:sp>
@@ -1490,7 +1498,7 @@
           <a:p>
             <a:pPr lvl="0"/>
             <a:r>
-              <a:rPr lang="zh-TW" altLang="en-US" smtClean="0"/>
+              <a:rPr lang="zh-TW" altLang="en-US"/>
               <a:t>按一下以編輯母片文字樣式</a:t>
             </a:r>
           </a:p>
@@ -1546,38 +1554,37 @@
           <a:p>
             <a:pPr lvl="0"/>
             <a:r>
-              <a:rPr lang="zh-TW" altLang="en-US" smtClean="0"/>
+              <a:rPr lang="zh-TW" altLang="en-US"/>
               <a:t>按一下以編輯母片文字樣式</a:t>
             </a:r>
           </a:p>
           <a:p>
             <a:pPr lvl="1"/>
             <a:r>
-              <a:rPr lang="zh-TW" altLang="en-US" smtClean="0"/>
+              <a:rPr lang="zh-TW" altLang="en-US"/>
               <a:t>第二層</a:t>
             </a:r>
           </a:p>
           <a:p>
             <a:pPr lvl="2"/>
             <a:r>
-              <a:rPr lang="zh-TW" altLang="en-US" smtClean="0"/>
+              <a:rPr lang="zh-TW" altLang="en-US"/>
               <a:t>第三層</a:t>
             </a:r>
           </a:p>
           <a:p>
             <a:pPr lvl="3"/>
             <a:r>
-              <a:rPr lang="zh-TW" altLang="en-US" smtClean="0"/>
+              <a:rPr lang="zh-TW" altLang="en-US"/>
               <a:t>第四層</a:t>
             </a:r>
           </a:p>
           <a:p>
             <a:pPr lvl="4"/>
             <a:r>
-              <a:rPr lang="zh-TW" altLang="en-US" smtClean="0"/>
+              <a:rPr lang="zh-TW" altLang="en-US"/>
               <a:t>第五層</a:t>
             </a:r>
-            <a:endParaRPr lang="zh-TW" altLang="en-US"/>
           </a:p>
         </p:txBody>
       </p:sp>
@@ -1640,7 +1647,7 @@
           <a:p>
             <a:pPr lvl="0"/>
             <a:r>
-              <a:rPr lang="zh-TW" altLang="en-US" smtClean="0"/>
+              <a:rPr lang="zh-TW" altLang="en-US"/>
               <a:t>按一下以編輯母片文字樣式</a:t>
             </a:r>
           </a:p>
@@ -1696,38 +1703,37 @@
           <a:p>
             <a:pPr lvl="0"/>
             <a:r>
-              <a:rPr lang="zh-TW" altLang="en-US" smtClean="0"/>
+              <a:rPr lang="zh-TW" altLang="en-US"/>
               <a:t>按一下以編輯母片文字樣式</a:t>
             </a:r>
           </a:p>
           <a:p>
             <a:pPr lvl="1"/>
             <a:r>
-              <a:rPr lang="zh-TW" altLang="en-US" smtClean="0"/>
+              <a:rPr lang="zh-TW" altLang="en-US"/>
               <a:t>第二層</a:t>
             </a:r>
           </a:p>
           <a:p>
             <a:pPr lvl="2"/>
             <a:r>
-              <a:rPr lang="zh-TW" altLang="en-US" smtClean="0"/>
+              <a:rPr lang="zh-TW" altLang="en-US"/>
               <a:t>第三層</a:t>
             </a:r>
           </a:p>
           <a:p>
             <a:pPr lvl="3"/>
             <a:r>
-              <a:rPr lang="zh-TW" altLang="en-US" smtClean="0"/>
+              <a:rPr lang="zh-TW" altLang="en-US"/>
               <a:t>第四層</a:t>
             </a:r>
           </a:p>
           <a:p>
             <a:pPr lvl="4"/>
             <a:r>
-              <a:rPr lang="zh-TW" altLang="en-US" smtClean="0"/>
+              <a:rPr lang="zh-TW" altLang="en-US"/>
               <a:t>第五層</a:t>
             </a:r>
-            <a:endParaRPr lang="zh-TW" altLang="en-US"/>
           </a:p>
         </p:txBody>
       </p:sp>
@@ -1749,7 +1755,7 @@
             <a:fld id="{E5595432-FB33-4E7B-BE27-1C70122E4CA3}" type="datetimeFigureOut">
               <a:rPr lang="zh-TW" altLang="en-US" smtClean="0"/>
               <a:pPr/>
-              <a:t>2022/3/22</a:t>
+              <a:t>2026/6/12</a:t>
             </a:fld>
             <a:endParaRPr lang="zh-TW" altLang="en-US"/>
           </a:p>
@@ -1839,10 +1845,9 @@
           <a:lstStyle/>
           <a:p>
             <a:r>
-              <a:rPr lang="zh-TW" altLang="en-US" smtClean="0"/>
+              <a:rPr lang="zh-TW" altLang="en-US"/>
               <a:t>按一下以編輯母片標題樣式</a:t>
             </a:r>
-            <a:endParaRPr lang="zh-TW" altLang="en-US"/>
           </a:p>
         </p:txBody>
       </p:sp>
@@ -1864,7 +1869,7 @@
             <a:fld id="{E5595432-FB33-4E7B-BE27-1C70122E4CA3}" type="datetimeFigureOut">
               <a:rPr lang="zh-TW" altLang="en-US" smtClean="0"/>
               <a:pPr/>
-              <a:t>2022/3/22</a:t>
+              <a:t>2026/6/12</a:t>
             </a:fld>
             <a:endParaRPr lang="zh-TW" altLang="en-US"/>
           </a:p>
@@ -1956,7 +1961,7 @@
             <a:fld id="{E5595432-FB33-4E7B-BE27-1C70122E4CA3}" type="datetimeFigureOut">
               <a:rPr lang="zh-TW" altLang="en-US" smtClean="0"/>
               <a:pPr/>
-              <a:t>2022/3/22</a:t>
+              <a:t>2026/6/12</a:t>
             </a:fld>
             <a:endParaRPr lang="zh-TW" altLang="en-US"/>
           </a:p>
@@ -2055,10 +2060,9 @@
           </a:lstStyle>
           <a:p>
             <a:r>
-              <a:rPr lang="zh-TW" altLang="en-US" smtClean="0"/>
+              <a:rPr lang="zh-TW" altLang="en-US"/>
               <a:t>按一下以編輯母片標題樣式</a:t>
             </a:r>
-            <a:endParaRPr lang="zh-TW" altLang="en-US"/>
           </a:p>
         </p:txBody>
       </p:sp>
@@ -2112,38 +2116,37 @@
           <a:p>
             <a:pPr lvl="0"/>
             <a:r>
-              <a:rPr lang="zh-TW" altLang="en-US" smtClean="0"/>
+              <a:rPr lang="zh-TW" altLang="en-US"/>
               <a:t>按一下以編輯母片文字樣式</a:t>
             </a:r>
           </a:p>
           <a:p>
             <a:pPr lvl="1"/>
             <a:r>
-              <a:rPr lang="zh-TW" altLang="en-US" smtClean="0"/>
+              <a:rPr lang="zh-TW" altLang="en-US"/>
               <a:t>第二層</a:t>
             </a:r>
           </a:p>
           <a:p>
             <a:pPr lvl="2"/>
             <a:r>
-              <a:rPr lang="zh-TW" altLang="en-US" smtClean="0"/>
+              <a:rPr lang="zh-TW" altLang="en-US"/>
               <a:t>第三層</a:t>
             </a:r>
           </a:p>
           <a:p>
             <a:pPr lvl="3"/>
             <a:r>
-              <a:rPr lang="zh-TW" altLang="en-US" smtClean="0"/>
+              <a:rPr lang="zh-TW" altLang="en-US"/>
               <a:t>第四層</a:t>
             </a:r>
           </a:p>
           <a:p>
             <a:pPr lvl="4"/>
             <a:r>
-              <a:rPr lang="zh-TW" altLang="en-US" smtClean="0"/>
+              <a:rPr lang="zh-TW" altLang="en-US"/>
               <a:t>第五層</a:t>
             </a:r>
-            <a:endParaRPr lang="zh-TW" altLang="en-US"/>
           </a:p>
         </p:txBody>
       </p:sp>
@@ -2206,7 +2209,7 @@
           <a:p>
             <a:pPr lvl="0"/>
             <a:r>
-              <a:rPr lang="zh-TW" altLang="en-US" smtClean="0"/>
+              <a:rPr lang="zh-TW" altLang="en-US"/>
               <a:t>按一下以編輯母片文字樣式</a:t>
             </a:r>
           </a:p>
@@ -2230,7 +2233,7 @@
             <a:fld id="{E5595432-FB33-4E7B-BE27-1C70122E4CA3}" type="datetimeFigureOut">
               <a:rPr lang="zh-TW" altLang="en-US" smtClean="0"/>
               <a:pPr/>
-              <a:t>2022/3/22</a:t>
+              <a:t>2026/6/12</a:t>
             </a:fld>
             <a:endParaRPr lang="zh-TW" altLang="en-US"/>
           </a:p>
@@ -2329,10 +2332,9 @@
           </a:lstStyle>
           <a:p>
             <a:r>
-              <a:rPr lang="zh-TW" altLang="en-US" smtClean="0"/>
+              <a:rPr lang="zh-TW" altLang="en-US"/>
               <a:t>按一下以編輯母片標題樣式</a:t>
             </a:r>
-            <a:endParaRPr lang="zh-TW" altLang="en-US"/>
           </a:p>
         </p:txBody>
       </p:sp>
@@ -2394,10 +2396,9 @@
           </a:lstStyle>
           <a:p>
             <a:r>
-              <a:rPr lang="zh-TW" altLang="en-US" smtClean="0"/>
+              <a:rPr lang="zh-TW" altLang="en-US"/>
               <a:t>按一下圖示以新增圖片</a:t>
             </a:r>
-            <a:endParaRPr lang="zh-TW" altLang="en-US"/>
           </a:p>
         </p:txBody>
       </p:sp>
@@ -2460,7 +2461,7 @@
           <a:p>
             <a:pPr lvl="0"/>
             <a:r>
-              <a:rPr lang="zh-TW" altLang="en-US" smtClean="0"/>
+              <a:rPr lang="zh-TW" altLang="en-US"/>
               <a:t>按一下以編輯母片文字樣式</a:t>
             </a:r>
           </a:p>
@@ -2484,7 +2485,7 @@
             <a:fld id="{E5595432-FB33-4E7B-BE27-1C70122E4CA3}" type="datetimeFigureOut">
               <a:rPr lang="zh-TW" altLang="en-US" smtClean="0"/>
               <a:pPr/>
-              <a:t>2022/3/22</a:t>
+              <a:t>2026/6/12</a:t>
             </a:fld>
             <a:endParaRPr lang="zh-TW" altLang="en-US"/>
           </a:p>
@@ -2594,10 +2595,9 @@
           <a:lstStyle/>
           <a:p>
             <a:r>
-              <a:rPr lang="zh-TW" altLang="en-US" smtClean="0"/>
+              <a:rPr lang="zh-TW" altLang="en-US"/>
               <a:t>按一下以編輯母片標題樣式</a:t>
             </a:r>
-            <a:endParaRPr lang="zh-TW" altLang="en-US"/>
           </a:p>
         </p:txBody>
       </p:sp>
@@ -2628,38 +2628,37 @@
           <a:p>
             <a:pPr lvl="0"/>
             <a:r>
-              <a:rPr lang="zh-TW" altLang="en-US" smtClean="0"/>
+              <a:rPr lang="zh-TW" altLang="en-US"/>
               <a:t>按一下以編輯母片文字樣式</a:t>
             </a:r>
           </a:p>
           <a:p>
             <a:pPr lvl="1"/>
             <a:r>
-              <a:rPr lang="zh-TW" altLang="en-US" smtClean="0"/>
+              <a:rPr lang="zh-TW" altLang="en-US"/>
               <a:t>第二層</a:t>
             </a:r>
           </a:p>
           <a:p>
             <a:pPr lvl="2"/>
             <a:r>
-              <a:rPr lang="zh-TW" altLang="en-US" smtClean="0"/>
+              <a:rPr lang="zh-TW" altLang="en-US"/>
               <a:t>第三層</a:t>
             </a:r>
           </a:p>
           <a:p>
             <a:pPr lvl="3"/>
             <a:r>
-              <a:rPr lang="zh-TW" altLang="en-US" smtClean="0"/>
+              <a:rPr lang="zh-TW" altLang="en-US"/>
               <a:t>第四層</a:t>
             </a:r>
           </a:p>
           <a:p>
             <a:pPr lvl="4"/>
             <a:r>
-              <a:rPr lang="zh-TW" altLang="en-US" smtClean="0"/>
+              <a:rPr lang="zh-TW" altLang="en-US"/>
               <a:t>第五層</a:t>
             </a:r>
-            <a:endParaRPr lang="zh-TW" altLang="en-US"/>
           </a:p>
         </p:txBody>
       </p:sp>
@@ -2699,7 +2698,7 @@
             <a:fld id="{E5595432-FB33-4E7B-BE27-1C70122E4CA3}" type="datetimeFigureOut">
               <a:rPr lang="zh-TW" altLang="en-US" smtClean="0"/>
               <a:pPr/>
-              <a:t>2022/3/22</a:t>
+              <a:t>2026/6/12</a:t>
             </a:fld>
             <a:endParaRPr lang="zh-TW" altLang="en-US"/>
           </a:p>
@@ -3058,7 +3057,13 @@
   <p:cSld>
     <p:spTree>
       <p:nvGrpSpPr>
-        <p:cNvPr id="1" name=""/>
+        <p:cNvPr id="1" name="">
+          <a:extLst>
+            <a:ext uri="{FF2B5EF4-FFF2-40B4-BE49-F238E27FC236}">
+              <a16:creationId xmlns:a16="http://schemas.microsoft.com/office/drawing/2014/main" id="{5F20F3D7-EDDF-CE30-9060-314A88E3730B}"/>
+            </a:ext>
+          </a:extLst>
+        </p:cNvPr>
         <p:cNvGrpSpPr/>
         <p:nvPr/>
       </p:nvGrpSpPr>
@@ -3072,7 +3077,13 @@
       </p:grpSpPr>
       <p:sp>
         <p:nvSpPr>
-          <p:cNvPr id="4" name="標題 3"/>
+          <p:cNvPr id="4" name="標題 3">
+            <a:extLst>
+              <a:ext uri="{FF2B5EF4-FFF2-40B4-BE49-F238E27FC236}">
+                <a16:creationId xmlns:a16="http://schemas.microsoft.com/office/drawing/2014/main" id="{CD6A41DD-B5E6-D530-EC0F-85726817D119}"/>
+              </a:ext>
+            </a:extLst>
+          </p:cNvPr>
           <p:cNvSpPr>
             <a:spLocks noGrp="1"/>
           </p:cNvSpPr>
@@ -3080,234 +3091,44 @@
             <p:ph type="title"/>
           </p:nvPr>
         </p:nvSpPr>
-        <p:spPr/>
-        <p:txBody>
-          <a:bodyPr/>
-          <a:lstStyle/>
-          <a:p>
-            <a:r>
-              <a:rPr lang="zh-TW" altLang="en-US" b="1" dirty="0" smtClean="0">
+        <p:spPr>
+          <a:xfrm>
+            <a:off x="0" y="1995686"/>
+            <a:ext cx="9144000" cy="857250"/>
+          </a:xfrm>
+        </p:spPr>
+        <p:txBody>
+          <a:bodyPr>
+            <a:noAutofit/>
+          </a:bodyPr>
+          <a:lstStyle/>
+          <a:p>
+            <a:r>
+              <a:rPr lang="zh-TW" altLang="en-US" sz="5400" b="1" i="1" dirty="0">
                 <a:solidFill>
                   <a:srgbClr val="000066"/>
                 </a:solidFill>
+                <a:effectLst>
+                  <a:outerShdw blurRad="38100" dist="38100" dir="2700000" algn="tl">
+                    <a:srgbClr val="000000">
+                      <a:alpha val="43137"/>
+                    </a:srgbClr>
+                  </a:outerShdw>
+                </a:effectLst>
                 <a:latin typeface="微軟正黑體" pitchFamily="34" charset="-120"/>
                 <a:ea typeface="微軟正黑體" pitchFamily="34" charset="-120"/>
               </a:rPr>
               <a:t>容我寧靜</a:t>
             </a:r>
-            <a:endParaRPr lang="zh-TW" altLang="en-US" b="1" dirty="0">
-              <a:solidFill>
-                <a:srgbClr val="000066"/>
-              </a:solidFill>
-              <a:latin typeface="微軟正黑體" pitchFamily="34" charset="-120"/>
-              <a:ea typeface="微軟正黑體" pitchFamily="34" charset="-120"/>
-            </a:endParaRPr>
-          </a:p>
-        </p:txBody>
-      </p:sp>
-      <p:sp>
-        <p:nvSpPr>
-          <p:cNvPr id="5" name="內容版面配置區 4"/>
-          <p:cNvSpPr>
-            <a:spLocks noGrp="1"/>
-          </p:cNvSpPr>
-          <p:nvPr>
-            <p:ph idx="1"/>
-          </p:nvPr>
-        </p:nvSpPr>
-        <p:spPr>
-          <a:xfrm>
-            <a:off x="0" y="1200151"/>
-            <a:ext cx="9144000" cy="3394472"/>
-          </a:xfrm>
-        </p:spPr>
-        <p:txBody>
-          <a:bodyPr>
-            <a:noAutofit/>
-          </a:bodyPr>
-          <a:lstStyle/>
-          <a:p>
-            <a:pPr algn="ctr">
-              <a:buNone/>
-            </a:pPr>
-            <a:r>
-              <a:rPr lang="zh-TW" altLang="en-US" sz="4800" b="1" dirty="0" smtClean="0">
-                <a:solidFill>
-                  <a:srgbClr val="000066"/>
-                </a:solidFill>
-                <a:latin typeface="微軟正黑體" pitchFamily="34" charset="-120"/>
-                <a:ea typeface="微軟正黑體" pitchFamily="34" charset="-120"/>
-              </a:rPr>
-              <a:t>晨曦之中  我尋求神話語</a:t>
-            </a:r>
-            <a:endParaRPr lang="en-US" altLang="zh-TW" sz="4800" b="1" dirty="0" smtClean="0">
-              <a:solidFill>
-                <a:srgbClr val="000066"/>
-              </a:solidFill>
-              <a:latin typeface="微軟正黑體" pitchFamily="34" charset="-120"/>
-              <a:ea typeface="微軟正黑體" pitchFamily="34" charset="-120"/>
-            </a:endParaRPr>
-          </a:p>
-          <a:p>
-            <a:pPr algn="ctr">
-              <a:buNone/>
-            </a:pPr>
-            <a:r>
-              <a:rPr lang="zh-TW" altLang="en-US" sz="4800" b="1" dirty="0" smtClean="0">
-                <a:solidFill>
-                  <a:srgbClr val="000066"/>
-                </a:solidFill>
-                <a:latin typeface="微軟正黑體" pitchFamily="34" charset="-120"/>
-                <a:ea typeface="微軟正黑體" pitchFamily="34" charset="-120"/>
-              </a:rPr>
-              <a:t>每分一刻感激主多愛寵</a:t>
-            </a:r>
-            <a:endParaRPr lang="en-US" altLang="zh-TW" sz="4800" b="1" dirty="0" smtClean="0">
-              <a:solidFill>
-                <a:srgbClr val="000066"/>
-              </a:solidFill>
-              <a:latin typeface="微軟正黑體" pitchFamily="34" charset="-120"/>
-              <a:ea typeface="微軟正黑體" pitchFamily="34" charset="-120"/>
-            </a:endParaRPr>
-          </a:p>
-          <a:p>
-            <a:pPr algn="ctr">
-              <a:buNone/>
-            </a:pPr>
-            <a:r>
-              <a:rPr lang="zh-TW" altLang="en-US" sz="4800" b="1" dirty="0" smtClean="0">
-                <a:solidFill>
-                  <a:srgbClr val="000066"/>
-                </a:solidFill>
-                <a:latin typeface="微軟正黑體" pitchFamily="34" charset="-120"/>
-                <a:ea typeface="微軟正黑體" pitchFamily="34" charset="-120"/>
-              </a:rPr>
-              <a:t>日光之中人流離在多變世俗裡</a:t>
-            </a:r>
-            <a:endParaRPr lang="en-US" altLang="zh-TW" sz="4800" b="1" dirty="0" smtClean="0">
-              <a:solidFill>
-                <a:srgbClr val="000066"/>
-              </a:solidFill>
-              <a:latin typeface="微軟正黑體" pitchFamily="34" charset="-120"/>
-              <a:ea typeface="微軟正黑體" pitchFamily="34" charset="-120"/>
-            </a:endParaRPr>
-          </a:p>
-          <a:p>
-            <a:pPr algn="ctr">
-              <a:buNone/>
-            </a:pPr>
-            <a:r>
-              <a:rPr lang="zh-TW" altLang="en-US" sz="4800" b="1" dirty="0" smtClean="0">
-                <a:solidFill>
-                  <a:srgbClr val="000066"/>
-                </a:solidFill>
-                <a:latin typeface="微軟正黑體" pitchFamily="34" charset="-120"/>
-                <a:ea typeface="微軟正黑體" pitchFamily="34" charset="-120"/>
-              </a:rPr>
-              <a:t>啊聖靈  求你引導我禱</a:t>
-            </a:r>
-            <a:endParaRPr lang="zh-TW" altLang="en-US" sz="4800" b="1" dirty="0">
-              <a:solidFill>
-                <a:srgbClr val="000066"/>
-              </a:solidFill>
-              <a:latin typeface="微軟正黑體" pitchFamily="34" charset="-120"/>
-              <a:ea typeface="微軟正黑體" pitchFamily="34" charset="-120"/>
-            </a:endParaRPr>
-          </a:p>
-        </p:txBody>
-      </p:sp>
-      <p:sp>
-        <p:nvSpPr>
-          <p:cNvPr id="6" name="標題 3"/>
-          <p:cNvSpPr txBox="1">
-            <a:spLocks/>
-          </p:cNvSpPr>
-          <p:nvPr/>
-        </p:nvSpPr>
-        <p:spPr>
-          <a:xfrm>
-            <a:off x="0" y="4875625"/>
-            <a:ext cx="1357290" cy="267875"/>
-          </a:xfrm>
-          <a:prstGeom prst="rect">
-            <a:avLst/>
-          </a:prstGeom>
-        </p:spPr>
-        <p:txBody>
-          <a:bodyPr vert="horz" lIns="91440" tIns="45720" rIns="91440" bIns="45720" rtlCol="0" anchor="ctr">
-            <a:normAutofit fontScale="92500" lnSpcReduction="20000"/>
-          </a:bodyPr>
-          <a:lstStyle/>
-          <a:p>
-            <a:pPr marL="0" marR="0" lvl="0" indent="0" algn="ctr" defTabSz="914400" rtl="0" eaLnBrk="1" fontAlgn="auto" latinLnBrk="0" hangingPunct="1">
-              <a:lnSpc>
-                <a:spcPct val="100000"/>
-              </a:lnSpc>
-              <a:spcBef>
-                <a:spcPct val="0"/>
-              </a:spcBef>
-              <a:spcAft>
-                <a:spcPts val="0"/>
-              </a:spcAft>
-              <a:buClrTx/>
-              <a:buSzTx/>
-              <a:buFontTx/>
-              <a:buNone/>
-              <a:tabLst/>
-              <a:defRPr/>
-            </a:pPr>
-            <a:r>
-              <a:rPr kumimoji="0" lang="zh-TW" altLang="en-US" sz="1500" b="1" i="0" u="none" strike="noStrike" kern="1200" cap="none" spc="0" normalizeH="0" baseline="0" noProof="0" dirty="0" smtClean="0">
-                <a:ln>
-                  <a:noFill/>
-                </a:ln>
-                <a:solidFill>
-                  <a:srgbClr val="000066"/>
-                </a:solidFill>
-                <a:effectLst/>
-                <a:uLnTx/>
-                <a:uFillTx/>
-                <a:latin typeface="微軟正黑體" pitchFamily="34" charset="-120"/>
-                <a:ea typeface="微軟正黑體" pitchFamily="34" charset="-120"/>
-                <a:cs typeface="+mj-cs"/>
-              </a:rPr>
-              <a:t>容我寧靜</a:t>
-            </a:r>
-            <a:r>
-              <a:rPr kumimoji="0" lang="en-US" altLang="zh-CN" sz="1500" b="1" i="0" u="none" strike="noStrike" kern="1200" cap="none" spc="0" normalizeH="0" baseline="0" noProof="0" dirty="0" smtClean="0">
-                <a:ln>
-                  <a:noFill/>
-                </a:ln>
-                <a:solidFill>
-                  <a:srgbClr val="000066"/>
-                </a:solidFill>
-                <a:effectLst/>
-                <a:uLnTx/>
-                <a:uFillTx/>
-                <a:latin typeface="微軟正黑體" pitchFamily="34" charset="-120"/>
-                <a:ea typeface="微軟正黑體" pitchFamily="34" charset="-120"/>
-                <a:cs typeface="+mj-cs"/>
-              </a:rPr>
-              <a:t>1/2</a:t>
-            </a:r>
-            <a:endParaRPr kumimoji="0" lang="zh-TW" altLang="en-US" sz="1500" b="1" i="0" u="none" strike="noStrike" kern="1200" cap="none" spc="0" normalizeH="0" baseline="0" noProof="0" dirty="0">
-              <a:ln>
-                <a:noFill/>
-              </a:ln>
-              <a:solidFill>
-                <a:srgbClr val="000066"/>
-              </a:solidFill>
-              <a:effectLst/>
-              <a:uLnTx/>
-              <a:uFillTx/>
-              <a:latin typeface="微軟正黑體" pitchFamily="34" charset="-120"/>
-              <a:ea typeface="微軟正黑體" pitchFamily="34" charset="-120"/>
-              <a:cs typeface="+mj-cs"/>
-            </a:endParaRPr>
           </a:p>
         </p:txBody>
       </p:sp>
     </p:spTree>
+    <p:extLst>
+      <p:ext uri="{BB962C8B-B14F-4D97-AF65-F5344CB8AC3E}">
+        <p14:creationId xmlns:p14="http://schemas.microsoft.com/office/powerpoint/2010/main" val="388492399"/>
+      </p:ext>
+    </p:extLst>
   </p:cSld>
   <p:clrMapOvr>
     <a:masterClrMapping/>
@@ -3320,7 +3141,13 @@
   <p:cSld>
     <p:spTree>
       <p:nvGrpSpPr>
-        <p:cNvPr id="1" name=""/>
+        <p:cNvPr id="1" name="">
+          <a:extLst>
+            <a:ext uri="{FF2B5EF4-FFF2-40B4-BE49-F238E27FC236}">
+              <a16:creationId xmlns:a16="http://schemas.microsoft.com/office/drawing/2014/main" id="{499F6A04-361B-D03C-72FC-83746A3861FC}"/>
+            </a:ext>
+          </a:extLst>
+        </p:cNvPr>
         <p:cNvGrpSpPr/>
         <p:nvPr/>
       </p:nvGrpSpPr>
@@ -3334,88 +3161,52 @@
       </p:grpSpPr>
       <p:sp>
         <p:nvSpPr>
-          <p:cNvPr id="4" name="標題 3"/>
-          <p:cNvSpPr>
-            <a:spLocks noGrp="1"/>
-          </p:cNvSpPr>
-          <p:nvPr>
-            <p:ph type="title"/>
-          </p:nvPr>
-        </p:nvSpPr>
-        <p:spPr/>
-        <p:txBody>
-          <a:bodyPr/>
-          <a:lstStyle/>
-          <a:p>
-            <a:r>
-              <a:rPr lang="zh-TW" altLang="en-US" b="1" dirty="0" smtClean="0">
+          <p:cNvPr id="5" name="內容版面配置區 4">
+            <a:extLst>
+              <a:ext uri="{FF2B5EF4-FFF2-40B4-BE49-F238E27FC236}">
+                <a16:creationId xmlns:a16="http://schemas.microsoft.com/office/drawing/2014/main" id="{EE77592B-EE8B-614D-4160-CDFC7BCE80DB}"/>
+              </a:ext>
+            </a:extLst>
+          </p:cNvPr>
+          <p:cNvSpPr>
+            <a:spLocks noGrp="1"/>
+          </p:cNvSpPr>
+          <p:nvPr>
+            <p:ph idx="1"/>
+          </p:nvPr>
+        </p:nvSpPr>
+        <p:spPr>
+          <a:xfrm>
+            <a:off x="0" y="1563639"/>
+            <a:ext cx="9144000" cy="1803647"/>
+          </a:xfrm>
+        </p:spPr>
+        <p:txBody>
+          <a:bodyPr anchor="ctr">
+            <a:normAutofit/>
+          </a:bodyPr>
+          <a:lstStyle/>
+          <a:p>
+            <a:pPr algn="ctr">
+              <a:buNone/>
+            </a:pPr>
+            <a:r>
+              <a:rPr lang="zh-TW" altLang="en-US" sz="4800" b="1" dirty="0">
                 <a:solidFill>
                   <a:srgbClr val="000066"/>
                 </a:solidFill>
                 <a:latin typeface="微軟正黑體" pitchFamily="34" charset="-120"/>
                 <a:ea typeface="微軟正黑體" pitchFamily="34" charset="-120"/>
               </a:rPr>
-              <a:t>容我寧靜</a:t>
-            </a:r>
-            <a:endParaRPr lang="zh-TW" altLang="en-US" b="1" dirty="0">
-              <a:solidFill>
-                <a:srgbClr val="000066"/>
-              </a:solidFill>
-              <a:latin typeface="微軟正黑體" pitchFamily="34" charset="-120"/>
-              <a:ea typeface="微軟正黑體" pitchFamily="34" charset="-120"/>
-            </a:endParaRPr>
-          </a:p>
-        </p:txBody>
-      </p:sp>
-      <p:sp>
-        <p:nvSpPr>
-          <p:cNvPr id="5" name="內容版面配置區 4"/>
-          <p:cNvSpPr>
-            <a:spLocks noGrp="1"/>
-          </p:cNvSpPr>
-          <p:nvPr>
-            <p:ph idx="1"/>
-          </p:nvPr>
-        </p:nvSpPr>
-        <p:spPr>
-          <a:xfrm>
-            <a:off x="0" y="1200151"/>
-            <a:ext cx="9144000" cy="3394472"/>
-          </a:xfrm>
-        </p:spPr>
-        <p:txBody>
-          <a:bodyPr>
-            <a:noAutofit/>
-          </a:bodyPr>
-          <a:lstStyle/>
+              <a:t>晨曦之中   我尋求神話語</a:t>
+            </a:r>
+          </a:p>
           <a:p>
             <a:pPr algn="ctr">
               <a:buNone/>
             </a:pPr>
             <a:r>
-              <a:rPr lang="zh-TW" altLang="en-US" sz="4800" b="1" dirty="0" smtClean="0">
-                <a:solidFill>
-                  <a:srgbClr val="000066"/>
-                </a:solidFill>
-                <a:latin typeface="微軟正黑體" pitchFamily="34" charset="-120"/>
-                <a:ea typeface="微軟正黑體" pitchFamily="34" charset="-120"/>
-              </a:rPr>
-              <a:t>晨曦之中  我尋求神話語</a:t>
-            </a:r>
-            <a:endParaRPr lang="en-US" altLang="zh-TW" sz="4800" b="1" dirty="0" smtClean="0">
-              <a:solidFill>
-                <a:srgbClr val="000066"/>
-              </a:solidFill>
-              <a:latin typeface="微軟正黑體" pitchFamily="34" charset="-120"/>
-              <a:ea typeface="微軟正黑體" pitchFamily="34" charset="-120"/>
-            </a:endParaRPr>
-          </a:p>
-          <a:p>
-            <a:pPr algn="ctr">
-              <a:buNone/>
-            </a:pPr>
-            <a:r>
-              <a:rPr lang="zh-TW" altLang="en-US" sz="4800" b="1" dirty="0" smtClean="0">
+              <a:rPr lang="zh-TW" altLang="en-US" sz="4800" b="1" dirty="0">
                 <a:solidFill>
                   <a:srgbClr val="000066"/>
                 </a:solidFill>
@@ -3424,174 +3215,93 @@
               </a:rPr>
               <a:t>每分一刻感激主多愛寵</a:t>
             </a:r>
-            <a:endParaRPr lang="en-US" altLang="zh-TW" sz="4800" b="1" dirty="0" smtClean="0">
-              <a:solidFill>
-                <a:srgbClr val="000066"/>
-              </a:solidFill>
-              <a:latin typeface="微軟正黑體" pitchFamily="34" charset="-120"/>
-              <a:ea typeface="微軟正黑體" pitchFamily="34" charset="-120"/>
-            </a:endParaRPr>
-          </a:p>
-          <a:p>
-            <a:pPr algn="ctr">
-              <a:buNone/>
-            </a:pPr>
-            <a:r>
-              <a:rPr lang="zh-TW" altLang="en-US" sz="4800" b="1" dirty="0" smtClean="0">
-                <a:solidFill>
-                  <a:srgbClr val="000066"/>
-                </a:solidFill>
-                <a:latin typeface="微軟正黑體" pitchFamily="34" charset="-120"/>
-                <a:ea typeface="微軟正黑體" pitchFamily="34" charset="-120"/>
-              </a:rPr>
-              <a:t>日光之中人流離在多變世俗裡</a:t>
-            </a:r>
-            <a:endParaRPr lang="en-US" altLang="zh-TW" sz="4800" b="1" dirty="0" smtClean="0">
-              <a:solidFill>
-                <a:srgbClr val="000066"/>
-              </a:solidFill>
-              <a:latin typeface="微軟正黑體" pitchFamily="34" charset="-120"/>
-              <a:ea typeface="微軟正黑體" pitchFamily="34" charset="-120"/>
-            </a:endParaRPr>
-          </a:p>
-          <a:p>
-            <a:pPr algn="ctr">
-              <a:buNone/>
-            </a:pPr>
-            <a:r>
-              <a:rPr lang="zh-TW" altLang="en-US" sz="4800" b="1" dirty="0" smtClean="0">
-                <a:solidFill>
-                  <a:srgbClr val="000066"/>
-                </a:solidFill>
-                <a:latin typeface="微軟正黑體" pitchFamily="34" charset="-120"/>
-                <a:ea typeface="微軟正黑體" pitchFamily="34" charset="-120"/>
-              </a:rPr>
-              <a:t>啊聖靈  求你引</a:t>
-            </a:r>
-            <a:r>
-              <a:rPr lang="zh-CN" altLang="en-US" sz="4800" b="1" dirty="0" smtClean="0">
-                <a:solidFill>
-                  <a:srgbClr val="000066"/>
-                </a:solidFill>
-                <a:latin typeface="微軟正黑體" pitchFamily="34" charset="-120"/>
-                <a:ea typeface="微軟正黑體" pitchFamily="34" charset="-120"/>
-              </a:rPr>
-              <a:t>潔淨我心</a:t>
-            </a:r>
-            <a:endParaRPr lang="en-US" altLang="zh-CN" sz="4800" b="1" dirty="0" smtClean="0">
-              <a:solidFill>
-                <a:srgbClr val="000066"/>
-              </a:solidFill>
-              <a:latin typeface="微軟正黑體" pitchFamily="34" charset="-120"/>
-              <a:ea typeface="微軟正黑體" pitchFamily="34" charset="-120"/>
-            </a:endParaRPr>
-          </a:p>
-          <a:p>
-            <a:pPr algn="ctr">
-              <a:buNone/>
-            </a:pPr>
-            <a:endParaRPr lang="zh-TW" altLang="en-US" sz="5400" b="1" dirty="0">
-              <a:solidFill>
-                <a:srgbClr val="000066"/>
-              </a:solidFill>
-              <a:latin typeface="微軟正黑體" pitchFamily="34" charset="-120"/>
-              <a:ea typeface="微軟正黑體" pitchFamily="34" charset="-120"/>
-            </a:endParaRPr>
-          </a:p>
-        </p:txBody>
-      </p:sp>
-      <p:sp>
-        <p:nvSpPr>
-          <p:cNvPr id="6" name="標題 3"/>
-          <p:cNvSpPr txBox="1">
-            <a:spLocks/>
-          </p:cNvSpPr>
+          </a:p>
+        </p:txBody>
+      </p:sp>
+      <p:sp>
+        <p:nvSpPr>
+          <p:cNvPr id="3" name="TextBox 2">
+            <a:extLst>
+              <a:ext uri="{FF2B5EF4-FFF2-40B4-BE49-F238E27FC236}">
+                <a16:creationId xmlns:a16="http://schemas.microsoft.com/office/drawing/2014/main" id="{FA175DD0-F211-14DE-420F-4A50F79B6BD2}"/>
+              </a:ext>
+            </a:extLst>
+          </p:cNvPr>
+          <p:cNvSpPr txBox="1"/>
           <p:nvPr/>
         </p:nvSpPr>
         <p:spPr>
           <a:xfrm>
-            <a:off x="0" y="4875625"/>
-            <a:ext cx="1357290" cy="267875"/>
+            <a:off x="0" y="3867895"/>
+            <a:ext cx="9144000" cy="461665"/>
           </a:xfrm>
           <a:prstGeom prst="rect">
             <a:avLst/>
           </a:prstGeom>
+          <a:noFill/>
         </p:spPr>
         <p:txBody>
-          <a:bodyPr vert="horz" lIns="91440" tIns="45720" rIns="91440" bIns="45720" rtlCol="0" anchor="ctr">
-            <a:normAutofit fontScale="92500" lnSpcReduction="20000"/>
+          <a:bodyPr wrap="square" rtlCol="0">
+            <a:spAutoFit/>
           </a:bodyPr>
           <a:lstStyle/>
           <a:p>
-            <a:pPr marL="0" marR="0" lvl="0" indent="0" algn="ctr" defTabSz="914400" rtl="0" eaLnBrk="1" fontAlgn="auto" latinLnBrk="0" hangingPunct="1">
-              <a:lnSpc>
-                <a:spcPct val="100000"/>
-              </a:lnSpc>
-              <a:spcBef>
-                <a:spcPct val="0"/>
-              </a:spcBef>
-              <a:spcAft>
-                <a:spcPts val="0"/>
-              </a:spcAft>
-              <a:buClrTx/>
-              <a:buSzTx/>
-              <a:buFontTx/>
-              <a:buNone/>
-              <a:tabLst/>
-              <a:defRPr/>
-            </a:pPr>
-            <a:r>
-              <a:rPr kumimoji="0" lang="zh-TW" altLang="en-US" sz="1500" b="1" i="0" u="none" strike="noStrike" kern="1200" cap="none" spc="0" normalizeH="0" baseline="0" noProof="0" dirty="0" smtClean="0">
-                <a:ln>
-                  <a:noFill/>
-                </a:ln>
+            <a:pPr algn="ctr"/>
+            <a:r>
+              <a:rPr lang="en-US" sz="2400" b="1" dirty="0">
                 <a:solidFill>
                   <a:srgbClr val="000066"/>
                 </a:solidFill>
-                <a:effectLst/>
-                <a:uLnTx/>
-                <a:uFillTx/>
-                <a:latin typeface="微軟正黑體" pitchFamily="34" charset="-120"/>
-                <a:ea typeface="微軟正黑體" pitchFamily="34" charset="-120"/>
-                <a:cs typeface="+mj-cs"/>
+                <a:latin typeface="Microsoft JhengHei" panose="020B0604030504040204" pitchFamily="34" charset="-120"/>
+                <a:ea typeface="Microsoft JhengHei" panose="020B0604030504040204" pitchFamily="34" charset="-120"/>
               </a:rPr>
-              <a:t>容我寧靜</a:t>
-            </a:r>
-            <a:r>
-              <a:rPr kumimoji="0" lang="en-US" altLang="zh-CN" sz="1500" b="1" i="0" u="none" strike="noStrike" kern="1200" cap="none" spc="0" normalizeH="0" baseline="0" noProof="0" dirty="0" smtClean="0">
-                <a:ln>
-                  <a:noFill/>
-                </a:ln>
+              <a:t>( </a:t>
+            </a:r>
+            <a:r>
+              <a:rPr lang="zh-CN" altLang="en-US" sz="2400" b="1" dirty="0">
                 <a:solidFill>
                   <a:srgbClr val="000066"/>
                 </a:solidFill>
-                <a:effectLst/>
-                <a:uLnTx/>
-                <a:uFillTx/>
-                <a:latin typeface="微軟正黑體" pitchFamily="34" charset="-120"/>
-                <a:ea typeface="微軟正黑體" pitchFamily="34" charset="-120"/>
-                <a:cs typeface="+mj-cs"/>
+                <a:latin typeface="Microsoft JhengHei" panose="020B0604030504040204" pitchFamily="34" charset="-120"/>
+                <a:ea typeface="Microsoft JhengHei" panose="020B0604030504040204" pitchFamily="34" charset="-120"/>
               </a:rPr>
-              <a:t>1/2</a:t>
-            </a:r>
-            <a:endParaRPr kumimoji="0" lang="zh-TW" altLang="en-US" sz="1500" b="1" i="0" u="none" strike="noStrike" kern="1200" cap="none" spc="0" normalizeH="0" baseline="0" noProof="0" dirty="0">
-              <a:ln>
-                <a:noFill/>
-              </a:ln>
+              <a:t>正歌</a:t>
+            </a:r>
+            <a:r>
+              <a:rPr lang="en-US" altLang="zh-CN" sz="2400" b="1" dirty="0">
+                <a:solidFill>
+                  <a:srgbClr val="000066"/>
+                </a:solidFill>
+                <a:latin typeface="Microsoft JhengHei" panose="020B0604030504040204" pitchFamily="34" charset="-120"/>
+                <a:ea typeface="Microsoft JhengHei" panose="020B0604030504040204" pitchFamily="34" charset="-120"/>
+              </a:rPr>
+              <a:t> 1</a:t>
+            </a:r>
+            <a:r>
+              <a:rPr lang="en-US" sz="2400" b="1" dirty="0">
+                <a:solidFill>
+                  <a:srgbClr val="000066"/>
+                </a:solidFill>
+                <a:latin typeface="Microsoft JhengHei" panose="020B0604030504040204" pitchFamily="34" charset="-120"/>
+                <a:ea typeface="Microsoft JhengHei" panose="020B0604030504040204" pitchFamily="34" charset="-120"/>
+              </a:rPr>
+              <a:t> )</a:t>
+            </a:r>
+            <a:endParaRPr lang="vi-VN" sz="2400" b="1" dirty="0">
               <a:solidFill>
                 <a:srgbClr val="000066"/>
               </a:solidFill>
-              <a:effectLst/>
-              <a:uLnTx/>
-              <a:uFillTx/>
-              <a:latin typeface="微軟正黑體" pitchFamily="34" charset="-120"/>
-              <a:ea typeface="微軟正黑體" pitchFamily="34" charset="-120"/>
-              <a:cs typeface="+mj-cs"/>
+              <a:ea typeface="Microsoft JhengHei" panose="020B0604030504040204" pitchFamily="34" charset="-120"/>
             </a:endParaRPr>
           </a:p>
         </p:txBody>
       </p:sp>
     </p:spTree>
+    <p:extLst>
+      <p:ext uri="{BB962C8B-B14F-4D97-AF65-F5344CB8AC3E}">
+        <p14:creationId xmlns:p14="http://schemas.microsoft.com/office/powerpoint/2010/main" val="3885075056"/>
+      </p:ext>
+    </p:extLst>
   </p:cSld>
   <p:clrMapOvr>
     <a:masterClrMapping/>
@@ -3604,7 +3314,13 @@
   <p:cSld>
     <p:spTree>
       <p:nvGrpSpPr>
-        <p:cNvPr id="1" name=""/>
+        <p:cNvPr id="1" name="">
+          <a:extLst>
+            <a:ext uri="{FF2B5EF4-FFF2-40B4-BE49-F238E27FC236}">
+              <a16:creationId xmlns:a16="http://schemas.microsoft.com/office/drawing/2014/main" id="{A8C6211F-8F0D-F8D2-F1D6-526A1F7807F7}"/>
+            </a:ext>
+          </a:extLst>
+        </p:cNvPr>
         <p:cNvGrpSpPr/>
         <p:nvPr/>
       </p:nvGrpSpPr>
@@ -3618,7 +3334,13 @@
       </p:grpSpPr>
       <p:sp>
         <p:nvSpPr>
-          <p:cNvPr id="5" name="內容版面配置區 4"/>
+          <p:cNvPr id="5" name="內容版面配置區 4">
+            <a:extLst>
+              <a:ext uri="{FF2B5EF4-FFF2-40B4-BE49-F238E27FC236}">
+                <a16:creationId xmlns:a16="http://schemas.microsoft.com/office/drawing/2014/main" id="{D1A317D8-E21E-AC33-54AA-26E315D210F0}"/>
+              </a:ext>
+            </a:extLst>
+          </p:cNvPr>
           <p:cNvSpPr>
             <a:spLocks noGrp="1"/>
           </p:cNvSpPr>
@@ -3628,13 +3350,13 @@
         </p:nvSpPr>
         <p:spPr>
           <a:xfrm>
-            <a:off x="0" y="195270"/>
-            <a:ext cx="9144000" cy="4466042"/>
+            <a:off x="0" y="1563639"/>
+            <a:ext cx="9144000" cy="1803647"/>
           </a:xfrm>
         </p:spPr>
         <p:txBody>
-          <a:bodyPr>
-            <a:noAutofit/>
+          <a:bodyPr anchor="ctr">
+            <a:normAutofit/>
           </a:bodyPr>
           <a:lstStyle/>
           <a:p>
@@ -3642,73 +3364,358 @@
               <a:buNone/>
             </a:pPr>
             <a:r>
-              <a:rPr lang="zh-TW" altLang="en-US" sz="4400" b="1" dirty="0" smtClean="0">
+              <a:rPr lang="zh-TW" altLang="en-US" sz="4800" b="1" dirty="0">
                 <a:solidFill>
                   <a:srgbClr val="000066"/>
                 </a:solidFill>
                 <a:latin typeface="微軟正黑體" pitchFamily="34" charset="-120"/>
                 <a:ea typeface="微軟正黑體" pitchFamily="34" charset="-120"/>
               </a:rPr>
-              <a:t>容我寧靜  聽候在你的跟前</a:t>
-            </a:r>
-            <a:endParaRPr lang="en-US" altLang="zh-TW" sz="4400" b="1" dirty="0" smtClean="0">
+              <a:t>日光之中人流離在多變世俗裡</a:t>
+            </a:r>
+          </a:p>
+          <a:p>
+            <a:pPr algn="ctr">
+              <a:buNone/>
+            </a:pPr>
+            <a:r>
+              <a:rPr lang="zh-TW" altLang="en-US" sz="4800" b="1" dirty="0">
+                <a:solidFill>
+                  <a:srgbClr val="000066"/>
+                </a:solidFill>
+                <a:latin typeface="微軟正黑體" pitchFamily="34" charset="-120"/>
+                <a:ea typeface="微軟正黑體" pitchFamily="34" charset="-120"/>
+              </a:rPr>
+              <a:t>啊聖父   求祢潔淨我心</a:t>
+            </a:r>
+          </a:p>
+        </p:txBody>
+      </p:sp>
+      <p:sp>
+        <p:nvSpPr>
+          <p:cNvPr id="3" name="TextBox 2">
+            <a:extLst>
+              <a:ext uri="{FF2B5EF4-FFF2-40B4-BE49-F238E27FC236}">
+                <a16:creationId xmlns:a16="http://schemas.microsoft.com/office/drawing/2014/main" id="{26009502-FEB3-CA5B-C92F-6C01E2EDC931}"/>
+              </a:ext>
+            </a:extLst>
+          </p:cNvPr>
+          <p:cNvSpPr txBox="1"/>
+          <p:nvPr/>
+        </p:nvSpPr>
+        <p:spPr>
+          <a:xfrm>
+            <a:off x="0" y="3867895"/>
+            <a:ext cx="9144000" cy="461665"/>
+          </a:xfrm>
+          <a:prstGeom prst="rect">
+            <a:avLst/>
+          </a:prstGeom>
+          <a:noFill/>
+        </p:spPr>
+        <p:txBody>
+          <a:bodyPr wrap="square" rtlCol="0">
+            <a:spAutoFit/>
+          </a:bodyPr>
+          <a:lstStyle/>
+          <a:p>
+            <a:pPr algn="ctr"/>
+            <a:r>
+              <a:rPr lang="en-US" sz="2400" b="1" dirty="0">
+                <a:solidFill>
+                  <a:srgbClr val="000066"/>
+                </a:solidFill>
+                <a:latin typeface="Microsoft JhengHei" panose="020B0604030504040204" pitchFamily="34" charset="-120"/>
+                <a:ea typeface="Microsoft JhengHei" panose="020B0604030504040204" pitchFamily="34" charset="-120"/>
+              </a:rPr>
+              <a:t>( </a:t>
+            </a:r>
+            <a:r>
+              <a:rPr lang="zh-CN" altLang="en-US" sz="2400" b="1" dirty="0">
+                <a:solidFill>
+                  <a:srgbClr val="000066"/>
+                </a:solidFill>
+                <a:latin typeface="Microsoft JhengHei" panose="020B0604030504040204" pitchFamily="34" charset="-120"/>
+                <a:ea typeface="Microsoft JhengHei" panose="020B0604030504040204" pitchFamily="34" charset="-120"/>
+              </a:rPr>
+              <a:t>正歌</a:t>
+            </a:r>
+            <a:r>
+              <a:rPr lang="en-US" altLang="zh-CN" sz="2400" b="1" dirty="0">
+                <a:solidFill>
+                  <a:srgbClr val="000066"/>
+                </a:solidFill>
+                <a:latin typeface="Microsoft JhengHei" panose="020B0604030504040204" pitchFamily="34" charset="-120"/>
+                <a:ea typeface="Microsoft JhengHei" panose="020B0604030504040204" pitchFamily="34" charset="-120"/>
+              </a:rPr>
+              <a:t> 1</a:t>
+            </a:r>
+            <a:r>
+              <a:rPr lang="en-US" sz="2400" b="1" dirty="0">
+                <a:solidFill>
+                  <a:srgbClr val="000066"/>
+                </a:solidFill>
+                <a:latin typeface="Microsoft JhengHei" panose="020B0604030504040204" pitchFamily="34" charset="-120"/>
+                <a:ea typeface="Microsoft JhengHei" panose="020B0604030504040204" pitchFamily="34" charset="-120"/>
+              </a:rPr>
+              <a:t> )</a:t>
+            </a:r>
+            <a:endParaRPr lang="vi-VN" sz="2400" b="1" dirty="0">
               <a:solidFill>
                 <a:srgbClr val="000066"/>
               </a:solidFill>
-              <a:latin typeface="微軟正黑體" pitchFamily="34" charset="-120"/>
-              <a:ea typeface="微軟正黑體" pitchFamily="34" charset="-120"/>
+              <a:ea typeface="Microsoft JhengHei" panose="020B0604030504040204" pitchFamily="34" charset="-120"/>
             </a:endParaRPr>
           </a:p>
+        </p:txBody>
+      </p:sp>
+    </p:spTree>
+    <p:extLst>
+      <p:ext uri="{BB962C8B-B14F-4D97-AF65-F5344CB8AC3E}">
+        <p14:creationId xmlns:p14="http://schemas.microsoft.com/office/powerpoint/2010/main" val="355467400"/>
+      </p:ext>
+    </p:extLst>
+  </p:cSld>
+  <p:clrMapOvr>
+    <a:masterClrMapping/>
+  </p:clrMapOvr>
+</p:sld>
+</file>
+
+<file path=ppt/slides/slide4.xml><?xml version="1.0" encoding="utf-8"?>
+<p:sld xmlns:a="http://schemas.openxmlformats.org/drawingml/2006/main" xmlns:r="http://schemas.openxmlformats.org/officeDocument/2006/relationships" xmlns:p="http://schemas.openxmlformats.org/presentationml/2006/main">
+  <p:cSld>
+    <p:spTree>
+      <p:nvGrpSpPr>
+        <p:cNvPr id="1" name="">
+          <a:extLst>
+            <a:ext uri="{FF2B5EF4-FFF2-40B4-BE49-F238E27FC236}">
+              <a16:creationId xmlns:a16="http://schemas.microsoft.com/office/drawing/2014/main" id="{4193BE79-E209-48B7-ED11-D8C3492CAE5B}"/>
+            </a:ext>
+          </a:extLst>
+        </p:cNvPr>
+        <p:cNvGrpSpPr/>
+        <p:nvPr/>
+      </p:nvGrpSpPr>
+      <p:grpSpPr>
+        <a:xfrm>
+          <a:off x="0" y="0"/>
+          <a:ext cx="0" cy="0"/>
+          <a:chOff x="0" y="0"/>
+          <a:chExt cx="0" cy="0"/>
+        </a:xfrm>
+      </p:grpSpPr>
+      <p:sp>
+        <p:nvSpPr>
+          <p:cNvPr id="5" name="內容版面配置區 4">
+            <a:extLst>
+              <a:ext uri="{FF2B5EF4-FFF2-40B4-BE49-F238E27FC236}">
+                <a16:creationId xmlns:a16="http://schemas.microsoft.com/office/drawing/2014/main" id="{0C0119A0-1BD2-A731-C482-BBB8333BE04B}"/>
+              </a:ext>
+            </a:extLst>
+          </p:cNvPr>
+          <p:cNvSpPr>
+            <a:spLocks noGrp="1"/>
+          </p:cNvSpPr>
+          <p:nvPr>
+            <p:ph idx="1"/>
+          </p:nvPr>
+        </p:nvSpPr>
+        <p:spPr>
+          <a:xfrm>
+            <a:off x="0" y="1563639"/>
+            <a:ext cx="9144000" cy="1803647"/>
+          </a:xfrm>
+        </p:spPr>
+        <p:txBody>
+          <a:bodyPr anchor="ctr">
+            <a:normAutofit/>
+          </a:bodyPr>
+          <a:lstStyle/>
           <a:p>
             <a:pPr algn="ctr">
               <a:buNone/>
             </a:pPr>
             <a:r>
-              <a:rPr lang="zh-TW" altLang="en-US" sz="4400" b="1" dirty="0" smtClean="0">
+              <a:rPr lang="zh-TW" altLang="en-US" sz="4800" b="1" dirty="0">
                 <a:solidFill>
                   <a:srgbClr val="000066"/>
                 </a:solidFill>
                 <a:latin typeface="微軟正黑體" pitchFamily="34" charset="-120"/>
                 <a:ea typeface="微軟正黑體" pitchFamily="34" charset="-120"/>
               </a:rPr>
-              <a:t>一心一意  願尋求你的旨意</a:t>
-            </a:r>
-            <a:endParaRPr lang="en-US" altLang="zh-TW" sz="4400" b="1" dirty="0" smtClean="0">
+              <a:t>容我寧靜   聽候在祢的跟前</a:t>
+            </a:r>
+          </a:p>
+          <a:p>
+            <a:pPr algn="ctr">
+              <a:buNone/>
+            </a:pPr>
+            <a:r>
+              <a:rPr lang="zh-TW" altLang="en-US" sz="4800" b="1" dirty="0">
+                <a:solidFill>
+                  <a:srgbClr val="000066"/>
+                </a:solidFill>
+                <a:latin typeface="微軟正黑體" pitchFamily="34" charset="-120"/>
+                <a:ea typeface="微軟正黑體" pitchFamily="34" charset="-120"/>
+              </a:rPr>
+              <a:t>一心一意   願尋求祢的旨意</a:t>
+            </a:r>
+          </a:p>
+        </p:txBody>
+      </p:sp>
+      <p:sp>
+        <p:nvSpPr>
+          <p:cNvPr id="3" name="TextBox 2">
+            <a:extLst>
+              <a:ext uri="{FF2B5EF4-FFF2-40B4-BE49-F238E27FC236}">
+                <a16:creationId xmlns:a16="http://schemas.microsoft.com/office/drawing/2014/main" id="{0E044E22-E9EE-2729-598B-85347B86F1E5}"/>
+              </a:ext>
+            </a:extLst>
+          </p:cNvPr>
+          <p:cNvSpPr txBox="1"/>
+          <p:nvPr/>
+        </p:nvSpPr>
+        <p:spPr>
+          <a:xfrm>
+            <a:off x="0" y="3867895"/>
+            <a:ext cx="9144000" cy="461665"/>
+          </a:xfrm>
+          <a:prstGeom prst="rect">
+            <a:avLst/>
+          </a:prstGeom>
+          <a:noFill/>
+        </p:spPr>
+        <p:txBody>
+          <a:bodyPr wrap="square" rtlCol="0">
+            <a:spAutoFit/>
+          </a:bodyPr>
+          <a:lstStyle/>
+          <a:p>
+            <a:pPr algn="ctr"/>
+            <a:r>
+              <a:rPr lang="en-US" sz="2400" b="1" dirty="0">
+                <a:solidFill>
+                  <a:srgbClr val="000066"/>
+                </a:solidFill>
+                <a:latin typeface="Microsoft JhengHei" panose="020B0604030504040204" pitchFamily="34" charset="-120"/>
+                <a:ea typeface="Microsoft JhengHei" panose="020B0604030504040204" pitchFamily="34" charset="-120"/>
+              </a:rPr>
+              <a:t>( </a:t>
+            </a:r>
+            <a:r>
+              <a:rPr lang="zh-CN" altLang="en-US" sz="2400" b="1" dirty="0">
+                <a:solidFill>
+                  <a:srgbClr val="000066"/>
+                </a:solidFill>
+                <a:latin typeface="Microsoft JhengHei" panose="020B0604030504040204" pitchFamily="34" charset="-120"/>
+                <a:ea typeface="Microsoft JhengHei" panose="020B0604030504040204" pitchFamily="34" charset="-120"/>
+              </a:rPr>
+              <a:t>副歌</a:t>
+            </a:r>
+            <a:r>
+              <a:rPr lang="en-US" sz="2400" b="1" dirty="0">
+                <a:solidFill>
+                  <a:srgbClr val="000066"/>
+                </a:solidFill>
+                <a:latin typeface="Microsoft JhengHei" panose="020B0604030504040204" pitchFamily="34" charset="-120"/>
+                <a:ea typeface="Microsoft JhengHei" panose="020B0604030504040204" pitchFamily="34" charset="-120"/>
+              </a:rPr>
+              <a:t> )</a:t>
+            </a:r>
+            <a:endParaRPr lang="vi-VN" sz="2400" b="1" dirty="0">
               <a:solidFill>
                 <a:srgbClr val="000066"/>
               </a:solidFill>
-              <a:latin typeface="微軟正黑體" pitchFamily="34" charset="-120"/>
-              <a:ea typeface="微軟正黑體" pitchFamily="34" charset="-120"/>
+              <a:ea typeface="Microsoft JhengHei" panose="020B0604030504040204" pitchFamily="34" charset="-120"/>
             </a:endParaRPr>
           </a:p>
+        </p:txBody>
+      </p:sp>
+    </p:spTree>
+    <p:extLst>
+      <p:ext uri="{BB962C8B-B14F-4D97-AF65-F5344CB8AC3E}">
+        <p14:creationId xmlns:p14="http://schemas.microsoft.com/office/powerpoint/2010/main" val="1123808327"/>
+      </p:ext>
+    </p:extLst>
+  </p:cSld>
+  <p:clrMapOvr>
+    <a:masterClrMapping/>
+  </p:clrMapOvr>
+</p:sld>
+</file>
+
+<file path=ppt/slides/slide5.xml><?xml version="1.0" encoding="utf-8"?>
+<p:sld xmlns:a="http://schemas.openxmlformats.org/drawingml/2006/main" xmlns:r="http://schemas.openxmlformats.org/officeDocument/2006/relationships" xmlns:p="http://schemas.openxmlformats.org/presentationml/2006/main">
+  <p:cSld>
+    <p:spTree>
+      <p:nvGrpSpPr>
+        <p:cNvPr id="1" name="">
+          <a:extLst>
+            <a:ext uri="{FF2B5EF4-FFF2-40B4-BE49-F238E27FC236}">
+              <a16:creationId xmlns:a16="http://schemas.microsoft.com/office/drawing/2014/main" id="{90CBF1A2-0D72-C3E2-5644-DF7D2FE6A98E}"/>
+            </a:ext>
+          </a:extLst>
+        </p:cNvPr>
+        <p:cNvGrpSpPr/>
+        <p:nvPr/>
+      </p:nvGrpSpPr>
+      <p:grpSpPr>
+        <a:xfrm>
+          <a:off x="0" y="0"/>
+          <a:ext cx="0" cy="0"/>
+          <a:chOff x="0" y="0"/>
+          <a:chExt cx="0" cy="0"/>
+        </a:xfrm>
+      </p:grpSpPr>
+      <p:sp>
+        <p:nvSpPr>
+          <p:cNvPr id="5" name="內容版面配置區 4">
+            <a:extLst>
+              <a:ext uri="{FF2B5EF4-FFF2-40B4-BE49-F238E27FC236}">
+                <a16:creationId xmlns:a16="http://schemas.microsoft.com/office/drawing/2014/main" id="{5A585D51-CD08-0E80-1B75-5239666C3A2C}"/>
+              </a:ext>
+            </a:extLst>
+          </p:cNvPr>
+          <p:cNvSpPr>
+            <a:spLocks noGrp="1"/>
+          </p:cNvSpPr>
+          <p:nvPr>
+            <p:ph idx="1"/>
+          </p:nvPr>
+        </p:nvSpPr>
+        <p:spPr>
+          <a:xfrm>
+            <a:off x="0" y="1563639"/>
+            <a:ext cx="9144000" cy="1803647"/>
+          </a:xfrm>
+        </p:spPr>
+        <p:txBody>
+          <a:bodyPr anchor="ctr">
+            <a:normAutofit/>
+          </a:bodyPr>
+          <a:lstStyle/>
           <a:p>
             <a:pPr algn="ctr">
               <a:buNone/>
             </a:pPr>
             <a:r>
-              <a:rPr lang="zh-TW" altLang="en-US" sz="4400" b="1" dirty="0" smtClean="0">
+              <a:rPr lang="zh-TW" altLang="en-US" sz="4800" b="1" dirty="0">
                 <a:solidFill>
                   <a:srgbClr val="000066"/>
                 </a:solidFill>
                 <a:latin typeface="微軟正黑體" pitchFamily="34" charset="-120"/>
                 <a:ea typeface="微軟正黑體" pitchFamily="34" charset="-120"/>
               </a:rPr>
-              <a:t>藏你懷內</a:t>
-            </a:r>
-            <a:endParaRPr lang="en-US" altLang="zh-TW" sz="4400" b="1" dirty="0" smtClean="0">
-              <a:solidFill>
-                <a:srgbClr val="000066"/>
-              </a:solidFill>
-              <a:latin typeface="微軟正黑體" pitchFamily="34" charset="-120"/>
-              <a:ea typeface="微軟正黑體" pitchFamily="34" charset="-120"/>
-            </a:endParaRPr>
+              <a:t>藏祢懷內</a:t>
+            </a:r>
           </a:p>
           <a:p>
             <a:pPr algn="ctr">
               <a:buNone/>
             </a:pPr>
             <a:r>
-              <a:rPr lang="zh-TW" altLang="en-US" sz="4400" b="1" dirty="0" smtClean="0">
+              <a:rPr lang="zh-TW" altLang="en-US" sz="4800" b="1" dirty="0">
                 <a:solidFill>
                   <a:srgbClr val="000066"/>
                 </a:solidFill>
@@ -3717,152 +3724,592 @@
               </a:rPr>
               <a:t>看萬事變得空虛光輝不再</a:t>
             </a:r>
-            <a:endParaRPr lang="en-US" altLang="zh-TW" sz="4400" b="1" dirty="0" smtClean="0">
-              <a:solidFill>
-                <a:srgbClr val="000066"/>
-              </a:solidFill>
-              <a:latin typeface="微軟正黑體" pitchFamily="34" charset="-120"/>
-              <a:ea typeface="微軟正黑體" pitchFamily="34" charset="-120"/>
-            </a:endParaRPr>
-          </a:p>
-          <a:p>
-            <a:pPr algn="ctr">
-              <a:buNone/>
-            </a:pPr>
-            <a:r>
-              <a:rPr lang="zh-TW" altLang="en-US" sz="4400" b="1" dirty="0" smtClean="0">
-                <a:solidFill>
-                  <a:srgbClr val="000066"/>
-                </a:solidFill>
-                <a:latin typeface="微軟正黑體" pitchFamily="34" charset="-120"/>
-                <a:ea typeface="微軟正黑體" pitchFamily="34" charset="-120"/>
-              </a:rPr>
-              <a:t>願我此刻知你是神</a:t>
-            </a:r>
-            <a:endParaRPr lang="en-US" altLang="zh-TW" sz="4400" b="1" dirty="0" smtClean="0">
-              <a:solidFill>
-                <a:srgbClr val="000066"/>
-              </a:solidFill>
-              <a:latin typeface="微軟正黑體" pitchFamily="34" charset="-120"/>
-              <a:ea typeface="微軟正黑體" pitchFamily="34" charset="-120"/>
-            </a:endParaRPr>
-          </a:p>
-          <a:p>
-            <a:pPr algn="ctr">
-              <a:buNone/>
-            </a:pPr>
-            <a:r>
-              <a:rPr lang="zh-TW" altLang="en-US" sz="4400" b="1" dirty="0" smtClean="0">
-                <a:solidFill>
-                  <a:srgbClr val="000066"/>
-                </a:solidFill>
-                <a:latin typeface="微軟正黑體" pitchFamily="34" charset="-120"/>
-                <a:ea typeface="微軟正黑體" pitchFamily="34" charset="-120"/>
-              </a:rPr>
-              <a:t>願我得享安息  在你手裡</a:t>
-            </a:r>
-            <a:endParaRPr lang="zh-TW" altLang="en-US" sz="4400" b="1" dirty="0">
-              <a:solidFill>
-                <a:srgbClr val="000066"/>
-              </a:solidFill>
-              <a:latin typeface="微軟正黑體" pitchFamily="34" charset="-120"/>
-              <a:ea typeface="微軟正黑體" pitchFamily="34" charset="-120"/>
-            </a:endParaRPr>
-          </a:p>
-        </p:txBody>
-      </p:sp>
-      <p:sp>
-        <p:nvSpPr>
-          <p:cNvPr id="7" name="標題 3"/>
-          <p:cNvSpPr txBox="1">
-            <a:spLocks/>
-          </p:cNvSpPr>
+          </a:p>
+        </p:txBody>
+      </p:sp>
+      <p:sp>
+        <p:nvSpPr>
+          <p:cNvPr id="3" name="TextBox 2">
+            <a:extLst>
+              <a:ext uri="{FF2B5EF4-FFF2-40B4-BE49-F238E27FC236}">
+                <a16:creationId xmlns:a16="http://schemas.microsoft.com/office/drawing/2014/main" id="{C592A29A-E39E-2997-53FE-3FACB7BD5BD7}"/>
+              </a:ext>
+            </a:extLst>
+          </p:cNvPr>
+          <p:cNvSpPr txBox="1"/>
           <p:nvPr/>
         </p:nvSpPr>
         <p:spPr>
           <a:xfrm>
-            <a:off x="0" y="4875625"/>
-            <a:ext cx="1357290" cy="267875"/>
+            <a:off x="0" y="3867895"/>
+            <a:ext cx="9144000" cy="461665"/>
           </a:xfrm>
           <a:prstGeom prst="rect">
             <a:avLst/>
           </a:prstGeom>
+          <a:noFill/>
         </p:spPr>
         <p:txBody>
-          <a:bodyPr vert="horz" lIns="91440" tIns="45720" rIns="91440" bIns="45720" rtlCol="0" anchor="ctr">
-            <a:normAutofit fontScale="92500" lnSpcReduction="20000"/>
+          <a:bodyPr wrap="square" rtlCol="0">
+            <a:spAutoFit/>
           </a:bodyPr>
           <a:lstStyle/>
           <a:p>
-            <a:pPr marL="0" marR="0" lvl="0" indent="0" algn="ctr" defTabSz="914400" rtl="0" eaLnBrk="1" fontAlgn="auto" latinLnBrk="0" hangingPunct="1">
-              <a:lnSpc>
-                <a:spcPct val="100000"/>
-              </a:lnSpc>
-              <a:spcBef>
-                <a:spcPct val="0"/>
-              </a:spcBef>
-              <a:spcAft>
-                <a:spcPts val="0"/>
-              </a:spcAft>
-              <a:buClrTx/>
-              <a:buSzTx/>
-              <a:buFontTx/>
-              <a:buNone/>
-              <a:tabLst/>
-              <a:defRPr/>
-            </a:pPr>
-            <a:r>
-              <a:rPr kumimoji="0" lang="zh-TW" altLang="en-US" sz="1500" b="1" i="0" u="none" strike="noStrike" kern="1200" cap="none" spc="0" normalizeH="0" baseline="0" noProof="0" dirty="0" smtClean="0">
-                <a:ln>
-                  <a:noFill/>
-                </a:ln>
+            <a:pPr algn="ctr"/>
+            <a:r>
+              <a:rPr lang="en-US" sz="2400" b="1" dirty="0">
                 <a:solidFill>
                   <a:srgbClr val="000066"/>
                 </a:solidFill>
-                <a:effectLst/>
-                <a:uLnTx/>
-                <a:uFillTx/>
-                <a:latin typeface="微軟正黑體" pitchFamily="34" charset="-120"/>
-                <a:ea typeface="微軟正黑體" pitchFamily="34" charset="-120"/>
-                <a:cs typeface="+mj-cs"/>
+                <a:latin typeface="Microsoft JhengHei" panose="020B0604030504040204" pitchFamily="34" charset="-120"/>
+                <a:ea typeface="Microsoft JhengHei" panose="020B0604030504040204" pitchFamily="34" charset="-120"/>
               </a:rPr>
-              <a:t>容我寧靜</a:t>
-            </a:r>
-            <a:r>
-              <a:rPr kumimoji="0" lang="en-US" altLang="zh-CN" sz="1500" b="1" i="0" u="none" strike="noStrike" kern="1200" cap="none" spc="0" normalizeH="0" baseline="0" noProof="0" dirty="0" smtClean="0">
-                <a:ln>
-                  <a:noFill/>
-                </a:ln>
+              <a:t>( </a:t>
+            </a:r>
+            <a:r>
+              <a:rPr lang="zh-CN" altLang="en-US" sz="2400" b="1" dirty="0">
                 <a:solidFill>
                   <a:srgbClr val="000066"/>
                 </a:solidFill>
-                <a:effectLst/>
-                <a:uLnTx/>
-                <a:uFillTx/>
-                <a:latin typeface="微軟正黑體" pitchFamily="34" charset="-120"/>
-                <a:ea typeface="微軟正黑體" pitchFamily="34" charset="-120"/>
-                <a:cs typeface="+mj-cs"/>
+                <a:latin typeface="Microsoft JhengHei" panose="020B0604030504040204" pitchFamily="34" charset="-120"/>
+                <a:ea typeface="Microsoft JhengHei" panose="020B0604030504040204" pitchFamily="34" charset="-120"/>
               </a:rPr>
-              <a:t>2/2</a:t>
-            </a:r>
-            <a:endParaRPr kumimoji="0" lang="zh-TW" altLang="en-US" sz="1500" b="1" i="0" u="none" strike="noStrike" kern="1200" cap="none" spc="0" normalizeH="0" baseline="0" noProof="0" dirty="0">
-              <a:ln>
-                <a:noFill/>
-              </a:ln>
+              <a:t>副歌</a:t>
+            </a:r>
+            <a:r>
+              <a:rPr lang="en-US" sz="2400" b="1" dirty="0">
+                <a:solidFill>
+                  <a:srgbClr val="000066"/>
+                </a:solidFill>
+                <a:latin typeface="Microsoft JhengHei" panose="020B0604030504040204" pitchFamily="34" charset="-120"/>
+                <a:ea typeface="Microsoft JhengHei" panose="020B0604030504040204" pitchFamily="34" charset="-120"/>
+              </a:rPr>
+              <a:t> )</a:t>
+            </a:r>
+            <a:endParaRPr lang="vi-VN" sz="2400" b="1" dirty="0">
               <a:solidFill>
                 <a:srgbClr val="000066"/>
               </a:solidFill>
-              <a:effectLst/>
-              <a:uLnTx/>
-              <a:uFillTx/>
-              <a:latin typeface="微軟正黑體" pitchFamily="34" charset="-120"/>
-              <a:ea typeface="微軟正黑體" pitchFamily="34" charset="-120"/>
-              <a:cs typeface="+mj-cs"/>
+              <a:ea typeface="Microsoft JhengHei" panose="020B0604030504040204" pitchFamily="34" charset="-120"/>
             </a:endParaRPr>
           </a:p>
         </p:txBody>
       </p:sp>
     </p:spTree>
+    <p:extLst>
+      <p:ext uri="{BB962C8B-B14F-4D97-AF65-F5344CB8AC3E}">
+        <p14:creationId xmlns:p14="http://schemas.microsoft.com/office/powerpoint/2010/main" val="2016573815"/>
+      </p:ext>
+    </p:extLst>
+  </p:cSld>
+  <p:clrMapOvr>
+    <a:masterClrMapping/>
+  </p:clrMapOvr>
+</p:sld>
+</file>
+
+<file path=ppt/slides/slide6.xml><?xml version="1.0" encoding="utf-8"?>
+<p:sld xmlns:a="http://schemas.openxmlformats.org/drawingml/2006/main" xmlns:r="http://schemas.openxmlformats.org/officeDocument/2006/relationships" xmlns:p="http://schemas.openxmlformats.org/presentationml/2006/main">
+  <p:cSld>
+    <p:spTree>
+      <p:nvGrpSpPr>
+        <p:cNvPr id="1" name="">
+          <a:extLst>
+            <a:ext uri="{FF2B5EF4-FFF2-40B4-BE49-F238E27FC236}">
+              <a16:creationId xmlns:a16="http://schemas.microsoft.com/office/drawing/2014/main" id="{BCA2F1C4-5879-D68A-C95B-671AF32453DE}"/>
+            </a:ext>
+          </a:extLst>
+        </p:cNvPr>
+        <p:cNvGrpSpPr/>
+        <p:nvPr/>
+      </p:nvGrpSpPr>
+      <p:grpSpPr>
+        <a:xfrm>
+          <a:off x="0" y="0"/>
+          <a:ext cx="0" cy="0"/>
+          <a:chOff x="0" y="0"/>
+          <a:chExt cx="0" cy="0"/>
+        </a:xfrm>
+      </p:grpSpPr>
+      <p:sp>
+        <p:nvSpPr>
+          <p:cNvPr id="5" name="內容版面配置區 4">
+            <a:extLst>
+              <a:ext uri="{FF2B5EF4-FFF2-40B4-BE49-F238E27FC236}">
+                <a16:creationId xmlns:a16="http://schemas.microsoft.com/office/drawing/2014/main" id="{D812C8FB-CE89-BB34-4A26-900417DBD151}"/>
+              </a:ext>
+            </a:extLst>
+          </p:cNvPr>
+          <p:cNvSpPr>
+            <a:spLocks noGrp="1"/>
+          </p:cNvSpPr>
+          <p:nvPr>
+            <p:ph idx="1"/>
+          </p:nvPr>
+        </p:nvSpPr>
+        <p:spPr>
+          <a:xfrm>
+            <a:off x="0" y="1563639"/>
+            <a:ext cx="9144000" cy="1803647"/>
+          </a:xfrm>
+        </p:spPr>
+        <p:txBody>
+          <a:bodyPr anchor="ctr">
+            <a:normAutofit/>
+          </a:bodyPr>
+          <a:lstStyle/>
+          <a:p>
+            <a:pPr algn="ctr">
+              <a:buNone/>
+            </a:pPr>
+            <a:r>
+              <a:rPr lang="zh-TW" altLang="en-US" sz="4800" b="1" dirty="0">
+                <a:solidFill>
+                  <a:srgbClr val="000066"/>
+                </a:solidFill>
+                <a:latin typeface="微軟正黑體" pitchFamily="34" charset="-120"/>
+                <a:ea typeface="微軟正黑體" pitchFamily="34" charset="-120"/>
+              </a:rPr>
+              <a:t>願我此刻知祢是神</a:t>
+            </a:r>
+          </a:p>
+          <a:p>
+            <a:pPr algn="ctr">
+              <a:buNone/>
+            </a:pPr>
+            <a:r>
+              <a:rPr lang="zh-TW" altLang="en-US" sz="4800" b="1" dirty="0">
+                <a:solidFill>
+                  <a:srgbClr val="000066"/>
+                </a:solidFill>
+                <a:latin typeface="微軟正黑體" pitchFamily="34" charset="-120"/>
+                <a:ea typeface="微軟正黑體" pitchFamily="34" charset="-120"/>
+              </a:rPr>
+              <a:t>願我得享安息  在祢手裡</a:t>
+            </a:r>
+          </a:p>
+        </p:txBody>
+      </p:sp>
+      <p:sp>
+        <p:nvSpPr>
+          <p:cNvPr id="3" name="TextBox 2">
+            <a:extLst>
+              <a:ext uri="{FF2B5EF4-FFF2-40B4-BE49-F238E27FC236}">
+                <a16:creationId xmlns:a16="http://schemas.microsoft.com/office/drawing/2014/main" id="{7FAB5684-1BF0-7F49-20B0-55BB8C69E1CE}"/>
+              </a:ext>
+            </a:extLst>
+          </p:cNvPr>
+          <p:cNvSpPr txBox="1"/>
+          <p:nvPr/>
+        </p:nvSpPr>
+        <p:spPr>
+          <a:xfrm>
+            <a:off x="0" y="3867895"/>
+            <a:ext cx="9144000" cy="461665"/>
+          </a:xfrm>
+          <a:prstGeom prst="rect">
+            <a:avLst/>
+          </a:prstGeom>
+          <a:noFill/>
+        </p:spPr>
+        <p:txBody>
+          <a:bodyPr wrap="square" rtlCol="0">
+            <a:spAutoFit/>
+          </a:bodyPr>
+          <a:lstStyle/>
+          <a:p>
+            <a:pPr algn="ctr"/>
+            <a:r>
+              <a:rPr lang="en-US" sz="2400" b="1" dirty="0">
+                <a:solidFill>
+                  <a:srgbClr val="000066"/>
+                </a:solidFill>
+                <a:latin typeface="Microsoft JhengHei" panose="020B0604030504040204" pitchFamily="34" charset="-120"/>
+                <a:ea typeface="Microsoft JhengHei" panose="020B0604030504040204" pitchFamily="34" charset="-120"/>
+              </a:rPr>
+              <a:t>( </a:t>
+            </a:r>
+            <a:r>
+              <a:rPr lang="zh-CN" altLang="en-US" sz="2400" b="1" dirty="0">
+                <a:solidFill>
+                  <a:srgbClr val="000066"/>
+                </a:solidFill>
+                <a:latin typeface="Microsoft JhengHei" panose="020B0604030504040204" pitchFamily="34" charset="-120"/>
+                <a:ea typeface="Microsoft JhengHei" panose="020B0604030504040204" pitchFamily="34" charset="-120"/>
+              </a:rPr>
+              <a:t>副歌</a:t>
+            </a:r>
+            <a:r>
+              <a:rPr lang="en-US" sz="2400" b="1" dirty="0">
+                <a:solidFill>
+                  <a:srgbClr val="000066"/>
+                </a:solidFill>
+                <a:latin typeface="Microsoft JhengHei" panose="020B0604030504040204" pitchFamily="34" charset="-120"/>
+                <a:ea typeface="Microsoft JhengHei" panose="020B0604030504040204" pitchFamily="34" charset="-120"/>
+              </a:rPr>
+              <a:t> )</a:t>
+            </a:r>
+            <a:endParaRPr lang="vi-VN" sz="2400" b="1" dirty="0">
+              <a:solidFill>
+                <a:srgbClr val="000066"/>
+              </a:solidFill>
+              <a:ea typeface="Microsoft JhengHei" panose="020B0604030504040204" pitchFamily="34" charset="-120"/>
+            </a:endParaRPr>
+          </a:p>
+        </p:txBody>
+      </p:sp>
+    </p:spTree>
+    <p:extLst>
+      <p:ext uri="{BB962C8B-B14F-4D97-AF65-F5344CB8AC3E}">
+        <p14:creationId xmlns:p14="http://schemas.microsoft.com/office/powerpoint/2010/main" val="1717059733"/>
+      </p:ext>
+    </p:extLst>
+  </p:cSld>
+  <p:clrMapOvr>
+    <a:masterClrMapping/>
+  </p:clrMapOvr>
+</p:sld>
+</file>
+
+<file path=ppt/slides/slide7.xml><?xml version="1.0" encoding="utf-8"?>
+<p:sld xmlns:a="http://schemas.openxmlformats.org/drawingml/2006/main" xmlns:r="http://schemas.openxmlformats.org/officeDocument/2006/relationships" xmlns:p="http://schemas.openxmlformats.org/presentationml/2006/main">
+  <p:cSld>
+    <p:spTree>
+      <p:nvGrpSpPr>
+        <p:cNvPr id="1" name="">
+          <a:extLst>
+            <a:ext uri="{FF2B5EF4-FFF2-40B4-BE49-F238E27FC236}">
+              <a16:creationId xmlns:a16="http://schemas.microsoft.com/office/drawing/2014/main" id="{30EA8410-CD08-9B31-D7A1-AF052432337A}"/>
+            </a:ext>
+          </a:extLst>
+        </p:cNvPr>
+        <p:cNvGrpSpPr/>
+        <p:nvPr/>
+      </p:nvGrpSpPr>
+      <p:grpSpPr>
+        <a:xfrm>
+          <a:off x="0" y="0"/>
+          <a:ext cx="0" cy="0"/>
+          <a:chOff x="0" y="0"/>
+          <a:chExt cx="0" cy="0"/>
+        </a:xfrm>
+      </p:grpSpPr>
+      <p:sp>
+        <p:nvSpPr>
+          <p:cNvPr id="5" name="內容版面配置區 4">
+            <a:extLst>
+              <a:ext uri="{FF2B5EF4-FFF2-40B4-BE49-F238E27FC236}">
+                <a16:creationId xmlns:a16="http://schemas.microsoft.com/office/drawing/2014/main" id="{8F751279-BA5B-00C3-276E-AAEB62AD5C09}"/>
+              </a:ext>
+            </a:extLst>
+          </p:cNvPr>
+          <p:cNvSpPr>
+            <a:spLocks noGrp="1"/>
+          </p:cNvSpPr>
+          <p:nvPr>
+            <p:ph idx="1"/>
+          </p:nvPr>
+        </p:nvSpPr>
+        <p:spPr>
+          <a:xfrm>
+            <a:off x="0" y="1563639"/>
+            <a:ext cx="9144000" cy="1803647"/>
+          </a:xfrm>
+        </p:spPr>
+        <p:txBody>
+          <a:bodyPr anchor="ctr">
+            <a:normAutofit/>
+          </a:bodyPr>
+          <a:lstStyle/>
+          <a:p>
+            <a:pPr algn="ctr">
+              <a:buNone/>
+            </a:pPr>
+            <a:r>
+              <a:rPr lang="zh-TW" altLang="en-US" sz="4800" b="1" dirty="0">
+                <a:solidFill>
+                  <a:srgbClr val="000066"/>
+                </a:solidFill>
+                <a:latin typeface="微軟正黑體" pitchFamily="34" charset="-120"/>
+                <a:ea typeface="微軟正黑體" pitchFamily="34" charset="-120"/>
+              </a:rPr>
+              <a:t>晨曦之中   我尋求神話語</a:t>
+            </a:r>
+          </a:p>
+          <a:p>
+            <a:pPr algn="ctr">
+              <a:buNone/>
+            </a:pPr>
+            <a:r>
+              <a:rPr lang="zh-TW" altLang="en-US" sz="4800" b="1" dirty="0">
+                <a:solidFill>
+                  <a:srgbClr val="000066"/>
+                </a:solidFill>
+                <a:latin typeface="微軟正黑體" pitchFamily="34" charset="-120"/>
+                <a:ea typeface="微軟正黑體" pitchFamily="34" charset="-120"/>
+              </a:rPr>
+              <a:t>每分一刻感激主多愛寵</a:t>
+            </a:r>
+          </a:p>
+        </p:txBody>
+      </p:sp>
+      <p:sp>
+        <p:nvSpPr>
+          <p:cNvPr id="3" name="TextBox 2">
+            <a:extLst>
+              <a:ext uri="{FF2B5EF4-FFF2-40B4-BE49-F238E27FC236}">
+                <a16:creationId xmlns:a16="http://schemas.microsoft.com/office/drawing/2014/main" id="{DBF6BFE3-9D92-0EF1-0C78-646B4EA136EB}"/>
+              </a:ext>
+            </a:extLst>
+          </p:cNvPr>
+          <p:cNvSpPr txBox="1"/>
+          <p:nvPr/>
+        </p:nvSpPr>
+        <p:spPr>
+          <a:xfrm>
+            <a:off x="0" y="3867895"/>
+            <a:ext cx="9144000" cy="461665"/>
+          </a:xfrm>
+          <a:prstGeom prst="rect">
+            <a:avLst/>
+          </a:prstGeom>
+          <a:noFill/>
+        </p:spPr>
+        <p:txBody>
+          <a:bodyPr wrap="square" rtlCol="0">
+            <a:spAutoFit/>
+          </a:bodyPr>
+          <a:lstStyle/>
+          <a:p>
+            <a:pPr algn="ctr"/>
+            <a:r>
+              <a:rPr lang="en-US" sz="2400" b="1" dirty="0">
+                <a:solidFill>
+                  <a:srgbClr val="000066"/>
+                </a:solidFill>
+                <a:latin typeface="Microsoft JhengHei" panose="020B0604030504040204" pitchFamily="34" charset="-120"/>
+                <a:ea typeface="Microsoft JhengHei" panose="020B0604030504040204" pitchFamily="34" charset="-120"/>
+              </a:rPr>
+              <a:t>( </a:t>
+            </a:r>
+            <a:r>
+              <a:rPr lang="zh-CN" altLang="en-US" sz="2400" b="1" dirty="0">
+                <a:solidFill>
+                  <a:srgbClr val="000066"/>
+                </a:solidFill>
+                <a:latin typeface="Microsoft JhengHei" panose="020B0604030504040204" pitchFamily="34" charset="-120"/>
+                <a:ea typeface="Microsoft JhengHei" panose="020B0604030504040204" pitchFamily="34" charset="-120"/>
+              </a:rPr>
+              <a:t>正歌</a:t>
+            </a:r>
+            <a:r>
+              <a:rPr lang="en-US" altLang="zh-CN" sz="2400" b="1" dirty="0">
+                <a:solidFill>
+                  <a:srgbClr val="000066"/>
+                </a:solidFill>
+                <a:latin typeface="Microsoft JhengHei" panose="020B0604030504040204" pitchFamily="34" charset="-120"/>
+                <a:ea typeface="Microsoft JhengHei" panose="020B0604030504040204" pitchFamily="34" charset="-120"/>
+              </a:rPr>
+              <a:t> 2</a:t>
+            </a:r>
+            <a:r>
+              <a:rPr lang="en-US" sz="2400" b="1" dirty="0">
+                <a:solidFill>
+                  <a:srgbClr val="000066"/>
+                </a:solidFill>
+                <a:latin typeface="Microsoft JhengHei" panose="020B0604030504040204" pitchFamily="34" charset="-120"/>
+                <a:ea typeface="Microsoft JhengHei" panose="020B0604030504040204" pitchFamily="34" charset="-120"/>
+              </a:rPr>
+              <a:t> )</a:t>
+            </a:r>
+            <a:endParaRPr lang="vi-VN" sz="2400" b="1" dirty="0">
+              <a:solidFill>
+                <a:srgbClr val="000066"/>
+              </a:solidFill>
+              <a:ea typeface="Microsoft JhengHei" panose="020B0604030504040204" pitchFamily="34" charset="-120"/>
+            </a:endParaRPr>
+          </a:p>
+        </p:txBody>
+      </p:sp>
+    </p:spTree>
+    <p:extLst>
+      <p:ext uri="{BB962C8B-B14F-4D97-AF65-F5344CB8AC3E}">
+        <p14:creationId xmlns:p14="http://schemas.microsoft.com/office/powerpoint/2010/main" val="4136685141"/>
+      </p:ext>
+    </p:extLst>
+  </p:cSld>
+  <p:clrMapOvr>
+    <a:masterClrMapping/>
+  </p:clrMapOvr>
+</p:sld>
+</file>
+
+<file path=ppt/slides/slide8.xml><?xml version="1.0" encoding="utf-8"?>
+<p:sld xmlns:a="http://schemas.openxmlformats.org/drawingml/2006/main" xmlns:r="http://schemas.openxmlformats.org/officeDocument/2006/relationships" xmlns:p="http://schemas.openxmlformats.org/presentationml/2006/main">
+  <p:cSld>
+    <p:spTree>
+      <p:nvGrpSpPr>
+        <p:cNvPr id="1" name="">
+          <a:extLst>
+            <a:ext uri="{FF2B5EF4-FFF2-40B4-BE49-F238E27FC236}">
+              <a16:creationId xmlns:a16="http://schemas.microsoft.com/office/drawing/2014/main" id="{02EA2D0B-C399-DAFB-6B2C-1F589E64463B}"/>
+            </a:ext>
+          </a:extLst>
+        </p:cNvPr>
+        <p:cNvGrpSpPr/>
+        <p:nvPr/>
+      </p:nvGrpSpPr>
+      <p:grpSpPr>
+        <a:xfrm>
+          <a:off x="0" y="0"/>
+          <a:ext cx="0" cy="0"/>
+          <a:chOff x="0" y="0"/>
+          <a:chExt cx="0" cy="0"/>
+        </a:xfrm>
+      </p:grpSpPr>
+      <p:sp>
+        <p:nvSpPr>
+          <p:cNvPr id="5" name="內容版面配置區 4">
+            <a:extLst>
+              <a:ext uri="{FF2B5EF4-FFF2-40B4-BE49-F238E27FC236}">
+                <a16:creationId xmlns:a16="http://schemas.microsoft.com/office/drawing/2014/main" id="{E4B40632-D90A-70BE-88D9-EC0C70BF3CC1}"/>
+              </a:ext>
+            </a:extLst>
+          </p:cNvPr>
+          <p:cNvSpPr>
+            <a:spLocks noGrp="1"/>
+          </p:cNvSpPr>
+          <p:nvPr>
+            <p:ph idx="1"/>
+          </p:nvPr>
+        </p:nvSpPr>
+        <p:spPr>
+          <a:xfrm>
+            <a:off x="0" y="1563639"/>
+            <a:ext cx="9144000" cy="1803647"/>
+          </a:xfrm>
+        </p:spPr>
+        <p:txBody>
+          <a:bodyPr anchor="ctr">
+            <a:normAutofit/>
+          </a:bodyPr>
+          <a:lstStyle/>
+          <a:p>
+            <a:pPr algn="ctr">
+              <a:buNone/>
+            </a:pPr>
+            <a:r>
+              <a:rPr lang="zh-TW" altLang="en-US" sz="4800" b="1" dirty="0">
+                <a:solidFill>
+                  <a:srgbClr val="000066"/>
+                </a:solidFill>
+                <a:latin typeface="微軟正黑體" pitchFamily="34" charset="-120"/>
+                <a:ea typeface="微軟正黑體" pitchFamily="34" charset="-120"/>
+              </a:rPr>
+              <a:t>日光之中人流離在多變世俗裡</a:t>
+            </a:r>
+          </a:p>
+          <a:p>
+            <a:pPr algn="ctr">
+              <a:buNone/>
+            </a:pPr>
+            <a:r>
+              <a:rPr lang="zh-TW" altLang="en-US" sz="4800" b="1" dirty="0">
+                <a:solidFill>
+                  <a:srgbClr val="000066"/>
+                </a:solidFill>
+                <a:latin typeface="微軟正黑體" pitchFamily="34" charset="-120"/>
+                <a:ea typeface="微軟正黑體" pitchFamily="34" charset="-120"/>
+              </a:rPr>
+              <a:t>啊聖靈   求祢引導我禱</a:t>
+            </a:r>
+          </a:p>
+        </p:txBody>
+      </p:sp>
+      <p:sp>
+        <p:nvSpPr>
+          <p:cNvPr id="3" name="TextBox 2">
+            <a:extLst>
+              <a:ext uri="{FF2B5EF4-FFF2-40B4-BE49-F238E27FC236}">
+                <a16:creationId xmlns:a16="http://schemas.microsoft.com/office/drawing/2014/main" id="{EAD624CC-7F85-AD2B-051B-FD991150E66D}"/>
+              </a:ext>
+            </a:extLst>
+          </p:cNvPr>
+          <p:cNvSpPr txBox="1"/>
+          <p:nvPr/>
+        </p:nvSpPr>
+        <p:spPr>
+          <a:xfrm>
+            <a:off x="0" y="3867895"/>
+            <a:ext cx="9144000" cy="461665"/>
+          </a:xfrm>
+          <a:prstGeom prst="rect">
+            <a:avLst/>
+          </a:prstGeom>
+          <a:noFill/>
+        </p:spPr>
+        <p:txBody>
+          <a:bodyPr wrap="square" rtlCol="0">
+            <a:spAutoFit/>
+          </a:bodyPr>
+          <a:lstStyle/>
+          <a:p>
+            <a:pPr algn="ctr"/>
+            <a:r>
+              <a:rPr lang="en-US" sz="2400" b="1" dirty="0">
+                <a:solidFill>
+                  <a:srgbClr val="000066"/>
+                </a:solidFill>
+                <a:latin typeface="Microsoft JhengHei" panose="020B0604030504040204" pitchFamily="34" charset="-120"/>
+                <a:ea typeface="Microsoft JhengHei" panose="020B0604030504040204" pitchFamily="34" charset="-120"/>
+              </a:rPr>
+              <a:t>( </a:t>
+            </a:r>
+            <a:r>
+              <a:rPr lang="zh-CN" altLang="en-US" sz="2400" b="1" dirty="0">
+                <a:solidFill>
+                  <a:srgbClr val="000066"/>
+                </a:solidFill>
+                <a:latin typeface="Microsoft JhengHei" panose="020B0604030504040204" pitchFamily="34" charset="-120"/>
+                <a:ea typeface="Microsoft JhengHei" panose="020B0604030504040204" pitchFamily="34" charset="-120"/>
+              </a:rPr>
+              <a:t>正歌</a:t>
+            </a:r>
+            <a:r>
+              <a:rPr lang="en-US" altLang="zh-CN" sz="2400" b="1" dirty="0">
+                <a:solidFill>
+                  <a:srgbClr val="000066"/>
+                </a:solidFill>
+                <a:latin typeface="Microsoft JhengHei" panose="020B0604030504040204" pitchFamily="34" charset="-120"/>
+                <a:ea typeface="Microsoft JhengHei" panose="020B0604030504040204" pitchFamily="34" charset="-120"/>
+              </a:rPr>
+              <a:t> 2</a:t>
+            </a:r>
+            <a:r>
+              <a:rPr lang="en-US" sz="2400" b="1" dirty="0">
+                <a:solidFill>
+                  <a:srgbClr val="000066"/>
+                </a:solidFill>
+                <a:latin typeface="Microsoft JhengHei" panose="020B0604030504040204" pitchFamily="34" charset="-120"/>
+                <a:ea typeface="Microsoft JhengHei" panose="020B0604030504040204" pitchFamily="34" charset="-120"/>
+              </a:rPr>
+              <a:t> )</a:t>
+            </a:r>
+            <a:endParaRPr lang="vi-VN" sz="2400" b="1" dirty="0">
+              <a:solidFill>
+                <a:srgbClr val="000066"/>
+              </a:solidFill>
+              <a:ea typeface="Microsoft JhengHei" panose="020B0604030504040204" pitchFamily="34" charset="-120"/>
+            </a:endParaRPr>
+          </a:p>
+        </p:txBody>
+      </p:sp>
+    </p:spTree>
+    <p:extLst>
+      <p:ext uri="{BB962C8B-B14F-4D97-AF65-F5344CB8AC3E}">
+        <p14:creationId xmlns:p14="http://schemas.microsoft.com/office/powerpoint/2010/main" val="956913537"/>
+      </p:ext>
+    </p:extLst>
   </p:cSld>
   <p:clrMapOvr>
     <a:masterClrMapping/>
